--- a/Livrables_suivi_23-10-2026/Support_suivi_23-10-2026.pptx
+++ b/Livrables_suivi_23-10-2026/Support_suivi_23-10-2026.pptx
@@ -15,6 +15,7 @@
     <p:sldId id="263" r:id="rId14"/>
     <p:sldId id="264" r:id="rId15"/>
     <p:sldId id="265" r:id="rId16"/>
+    <p:sldId id="266" r:id="rId17"/>
   </p:sldIdLst>
   <p:sldSz cx="12191695" cy="6858000" type="screen4x3"/>
   <p:notesSz cx="6858000" cy="9144000"/>
@@ -3142,44 +3143,37 @@
       </p:sp>
       <p:sp>
         <p:nvSpPr>
-          <p:cNvPr id="3" name="Rectangle 2"/>
-          <p:cNvSpPr/>
-          <p:nvPr/>
-        </p:nvSpPr>
-        <p:spPr>
-          <a:xfrm>
-            <a:off x="0" y="0"/>
-            <a:ext cx="12191695" cy="228600"/>
-          </a:xfrm>
-          <a:prstGeom prst="rect">
-            <a:avLst/>
-          </a:prstGeom>
-          <a:solidFill>
-            <a:srgbClr val="153A5B"/>
-          </a:solidFill>
-          <a:ln>
-            <a:noFill/>
-          </a:ln>
-        </p:spPr>
-        <p:style>
-          <a:lnRef idx="1">
-            <a:schemeClr val="accent1"/>
-          </a:lnRef>
-          <a:fillRef idx="3">
-            <a:schemeClr val="accent1"/>
-          </a:fillRef>
-          <a:effectRef idx="2">
-            <a:schemeClr val="accent1"/>
-          </a:effectRef>
-          <a:fontRef idx="minor">
-            <a:schemeClr val="lt1"/>
-          </a:fontRef>
-        </p:style>
-        <p:txBody>
-          <a:bodyPr rtlCol="0" anchor="ctr"/>
-          <a:lstStyle/>
-          <a:p>
-            <a:pPr algn="ctr"/>
+          <p:cNvPr id="3" name="TextBox 2"/>
+          <p:cNvSpPr txBox="1"/>
+          <p:nvPr/>
+        </p:nvSpPr>
+        <p:spPr>
+          <a:xfrm>
+            <a:off x="731520" y="685800"/>
+            <a:ext cx="10698480" cy="502920"/>
+          </a:xfrm>
+          <a:prstGeom prst="rect">
+            <a:avLst/>
+          </a:prstGeom>
+          <a:noFill/>
+        </p:spPr>
+        <p:txBody>
+          <a:bodyPr wrap="square" lIns="0" rIns="0">
+            <a:spAutoFit/>
+          </a:bodyPr>
+          <a:lstStyle/>
+          <a:p>
+            <a:pPr algn="ctr">
+              <a:defRPr sz="2400" b="1">
+                <a:solidFill>
+                  <a:srgbClr val="111111"/>
+                </a:solidFill>
+                <a:latin typeface="Arial"/>
+              </a:defRPr>
+            </a:pPr>
+            <a:r>
+              <a:t>Projet PI² n°176</a:t>
+            </a:r>
           </a:p>
         </p:txBody>
       </p:sp>
@@ -3191,8 +3185,8 @@
         </p:nvSpPr>
         <p:spPr>
           <a:xfrm>
-            <a:off x="731520" y="1143000"/>
-            <a:ext cx="10698480" cy="1645920"/>
+            <a:off x="1005840" y="1508760"/>
+            <a:ext cx="10149840" cy="1234440"/>
           </a:xfrm>
           <a:prstGeom prst="rect">
             <a:avLst/>
@@ -3200,53 +3194,25 @@
           <a:noFill/>
         </p:spPr>
         <p:txBody>
-          <a:bodyPr wrap="square">
+          <a:bodyPr wrap="square" lIns="0" rIns="0">
             <a:spAutoFit/>
           </a:bodyPr>
           <a:lstStyle/>
           <a:p>
             <a:pPr algn="ctr">
-              <a:defRPr b="1" sz="3000">
-                <a:solidFill>
-                  <a:srgbClr val="153A5B"/>
-                </a:solidFill>
-                <a:latin typeface="Arial"/>
-              </a:defRPr>
-            </a:pPr>
-            <a:r>
-              <a:t>Projet PI² n°176</a:t>
-            </a:r>
-          </a:p>
-          <a:p>
-            <a:pPr algn="ctr">
-              <a:spcBef>
-                <a:spcPts val="1000"/>
-              </a:spcBef>
-              <a:defRPr b="1" sz="2300">
-                <a:solidFill>
-                  <a:srgbClr val="153A5B"/>
-                </a:solidFill>
-                <a:latin typeface="Arial"/>
-              </a:defRPr>
-            </a:pPr>
-            <a:r>
-              <a:t>Dynamic of RND and Forecasting the Price of Derivatives</a:t>
-            </a:r>
-          </a:p>
-          <a:p>
-            <a:pPr algn="ctr">
-              <a:spcBef>
-                <a:spcPts val="1800"/>
-              </a:spcBef>
-              <a:defRPr sz="1700">
-                <a:solidFill>
-                  <a:srgbClr val="168AAD"/>
-                </a:solidFill>
-                <a:latin typeface="Arial"/>
-              </a:defRPr>
-            </a:pPr>
-            <a:r>
-              <a:t>Réunion de suivi n°1 — 23 octobre 2026</a:t>
+              <a:defRPr sz="3000" b="1">
+                <a:solidFill>
+                  <a:srgbClr val="111111"/>
+                </a:solidFill>
+                <a:latin typeface="Arial"/>
+              </a:defRPr>
+            </a:pPr>
+            <a:r>
+              <a:t>Estimation et dynamique des distributions risque-neutres</a:t>
+            </a:r>
+            <a:br/>
+            <a:r>
+              <a:t>à partir d’options SPX</a:t>
             </a:r>
           </a:p>
         </p:txBody>
@@ -3259,8 +3225,8 @@
         </p:nvSpPr>
         <p:spPr>
           <a:xfrm>
-            <a:off x="1097280" y="4069080"/>
-            <a:ext cx="9966960" cy="914400"/>
+            <a:off x="914400" y="3063240"/>
+            <a:ext cx="10332720" cy="411480"/>
           </a:xfrm>
           <a:prstGeom prst="rect">
             <a:avLst/>
@@ -3268,21 +3234,93 @@
           <a:noFill/>
         </p:spPr>
         <p:txBody>
-          <a:bodyPr wrap="none">
+          <a:bodyPr wrap="square" lIns="0" rIns="0">
             <a:spAutoFit/>
           </a:bodyPr>
           <a:lstStyle/>
           <a:p>
             <a:pPr algn="ctr">
-              <a:defRPr sz="1600">
-                <a:solidFill>
-                  <a:srgbClr val="24323D"/>
-                </a:solidFill>
-                <a:latin typeface="Arial"/>
-              </a:defRPr>
-            </a:pPr>
-            <a:r>
-              <a:t>Rayan Ait Arkoub · Matthieu Balliste · Ilan Chahdi · Nathan Denoux · Jordi Paris</a:t>
+              <a:defRPr sz="1700" b="0">
+                <a:solidFill>
+                  <a:srgbClr val="315B78"/>
+                </a:solidFill>
+                <a:latin typeface="Arial"/>
+              </a:defRPr>
+            </a:pPr>
+            <a:r>
+              <a:t>Réunion de suivi n°1  ·  23 octobre 2026</a:t>
+            </a:r>
+          </a:p>
+        </p:txBody>
+      </p:sp>
+      <p:sp>
+        <p:nvSpPr>
+          <p:cNvPr id="6" name="TextBox 5"/>
+          <p:cNvSpPr txBox="1"/>
+          <p:nvPr/>
+        </p:nvSpPr>
+        <p:spPr>
+          <a:xfrm>
+            <a:off x="731520" y="4800600"/>
+            <a:ext cx="10698480" cy="502920"/>
+          </a:xfrm>
+          <a:prstGeom prst="rect">
+            <a:avLst/>
+          </a:prstGeom>
+          <a:noFill/>
+        </p:spPr>
+        <p:txBody>
+          <a:bodyPr wrap="square" lIns="0" rIns="0">
+            <a:spAutoFit/>
+          </a:bodyPr>
+          <a:lstStyle/>
+          <a:p>
+            <a:pPr algn="ctr">
+              <a:defRPr sz="1500" b="0">
+                <a:solidFill>
+                  <a:srgbClr val="27313A"/>
+                </a:solidFill>
+                <a:latin typeface="Arial"/>
+              </a:defRPr>
+            </a:pPr>
+            <a:r>
+              <a:t>Rayan Ait Arkoub  ·  Matthieu Balliste  ·  Ilan Chahdi  ·  Nathan Denoux  ·  Jordi Paris</a:t>
+            </a:r>
+          </a:p>
+        </p:txBody>
+      </p:sp>
+      <p:sp>
+        <p:nvSpPr>
+          <p:cNvPr id="7" name="TextBox 6"/>
+          <p:cNvSpPr txBox="1"/>
+          <p:nvPr/>
+        </p:nvSpPr>
+        <p:spPr>
+          <a:xfrm>
+            <a:off x="914400" y="5285232"/>
+            <a:ext cx="10332720" cy="365760"/>
+          </a:xfrm>
+          <a:prstGeom prst="rect">
+            <a:avLst/>
+          </a:prstGeom>
+          <a:noFill/>
+        </p:spPr>
+        <p:txBody>
+          <a:bodyPr wrap="square" lIns="0" rIns="0">
+            <a:spAutoFit/>
+          </a:bodyPr>
+          <a:lstStyle/>
+          <a:p>
+            <a:pPr algn="ctr">
+              <a:defRPr sz="1300" b="0">
+                <a:solidFill>
+                  <a:srgbClr val="59636C"/>
+                </a:solidFill>
+                <a:latin typeface="Arial"/>
+              </a:defRPr>
+            </a:pPr>
+            <a:r>
+              <a:t>Tuteur : Matthieu Garcin</a:t>
             </a:r>
           </a:p>
         </p:txBody>
@@ -3356,14 +3394,14 @@
         </p:nvSpPr>
         <p:spPr>
           <a:xfrm>
-            <a:off x="0" y="0"/>
-            <a:ext cx="12191695" cy="164592"/>
+            <a:off x="530352" y="868680"/>
+            <a:ext cx="11109960" cy="16459"/>
           </a:xfrm>
           <a:prstGeom prst="rect">
             <a:avLst/>
           </a:prstGeom>
           <a:solidFill>
-            <a:srgbClr val="153A5B"/>
+            <a:srgbClr val="111111"/>
           </a:solidFill>
           <a:ln>
             <a:noFill/>
@@ -3399,8 +3437,8 @@
         </p:nvSpPr>
         <p:spPr>
           <a:xfrm>
-            <a:off x="594360" y="347472"/>
-            <a:ext cx="10881360" cy="566928"/>
+            <a:off x="566928" y="274320"/>
+            <a:ext cx="10881360" cy="502920"/>
           </a:xfrm>
           <a:prstGeom prst="rect">
             <a:avLst/>
@@ -3416,13 +3454,13 @@
             <a:pPr>
               <a:defRPr b="1" sz="2500">
                 <a:solidFill>
-                  <a:srgbClr val="153A5B"/>
-                </a:solidFill>
-                <a:latin typeface="Arial"/>
-              </a:defRPr>
-            </a:pPr>
-            <a:r>
-              <a:t>9. Prochaines étapes et décisions attendues</a:t>
+                  <a:srgbClr val="111111"/>
+                </a:solidFill>
+                <a:latin typeface="Arial"/>
+              </a:defRPr>
+            </a:pPr>
+            <a:r>
+              <a:t>9. Passage à la dynamique et test de stratégie</a:t>
             </a:r>
           </a:p>
         </p:txBody>
@@ -3435,8 +3473,8 @@
         </p:nvSpPr>
         <p:spPr>
           <a:xfrm>
-            <a:off x="594360" y="6510528"/>
-            <a:ext cx="10972800" cy="182880"/>
+            <a:off x="566928" y="6510528"/>
+            <a:ext cx="10972800" cy="164592"/>
           </a:xfrm>
           <a:prstGeom prst="rect">
             <a:avLst/>
@@ -3452,13 +3490,13 @@
             <a:pPr>
               <a:defRPr sz="800">
                 <a:solidFill>
-                  <a:srgbClr val="60717D"/>
-                </a:solidFill>
-                <a:latin typeface="Arial"/>
-              </a:defRPr>
-            </a:pPr>
-            <a:r>
-              <a:t>Projet PI² n°176 — Suivi n°1     10/10</a:t>
+                  <a:srgbClr val="59636C"/>
+                </a:solidFill>
+                <a:latin typeface="Arial"/>
+              </a:defRPr>
+            </a:pPr>
+            <a:r>
+              <a:t>Projet PI² n°176  ·  Suivi n°1  ·  23 octobre 2026                                      10/11</a:t>
             </a:r>
           </a:p>
         </p:txBody>
@@ -3471,8 +3509,8 @@
         </p:nvSpPr>
         <p:spPr>
           <a:xfrm>
-            <a:off x="777240" y="1143000"/>
-            <a:ext cx="5486400" cy="4389120"/>
+            <a:off x="731520" y="1097280"/>
+            <a:ext cx="5303520" cy="320040"/>
           </a:xfrm>
           <a:prstGeom prst="rect">
             <a:avLst/>
@@ -3480,7 +3518,127 @@
           <a:noFill/>
         </p:spPr>
         <p:txBody>
-          <a:bodyPr wrap="square" lIns="45720" rIns="27432">
+          <a:bodyPr wrap="square" lIns="0" rIns="0">
+            <a:spAutoFit/>
+          </a:bodyPr>
+          <a:lstStyle/>
+          <a:p>
+            <a:pPr algn="ctr">
+              <a:defRPr sz="1700" b="1">
+                <a:solidFill>
+                  <a:srgbClr val="111111"/>
+                </a:solidFill>
+                <a:latin typeface="Arial"/>
+              </a:defRPr>
+            </a:pPr>
+            <a:r>
+              <a:t>Réduction fonctionnelle</a:t>
+            </a:r>
+          </a:p>
+        </p:txBody>
+      </p:sp>
+      <p:pic>
+        <p:nvPicPr>
+          <p:cNvPr id="7" name="Picture 6" descr="eq_factor.png"/>
+          <p:cNvPicPr>
+            <a:picLocks noChangeAspect="1"/>
+          </p:cNvPicPr>
+          <p:nvPr/>
+        </p:nvPicPr>
+        <p:blipFill>
+          <a:blip r:embed="rId2"/>
+          <a:stretch>
+            <a:fillRect/>
+          </a:stretch>
+        </p:blipFill>
+        <p:spPr>
+          <a:xfrm>
+            <a:off x="1614883" y="1481328"/>
+            <a:ext cx="3353912" cy="749808"/>
+          </a:xfrm>
+          <a:prstGeom prst="rect">
+            <a:avLst/>
+          </a:prstGeom>
+        </p:spPr>
+      </p:pic>
+      <p:sp>
+        <p:nvSpPr>
+          <p:cNvPr id="8" name="TextBox 7"/>
+          <p:cNvSpPr txBox="1"/>
+          <p:nvPr/>
+        </p:nvSpPr>
+        <p:spPr>
+          <a:xfrm>
+            <a:off x="6172200" y="1097280"/>
+            <a:ext cx="5303520" cy="320040"/>
+          </a:xfrm>
+          <a:prstGeom prst="rect">
+            <a:avLst/>
+          </a:prstGeom>
+          <a:noFill/>
+        </p:spPr>
+        <p:txBody>
+          <a:bodyPr wrap="square" lIns="0" rIns="0">
+            <a:spAutoFit/>
+          </a:bodyPr>
+          <a:lstStyle/>
+          <a:p>
+            <a:pPr algn="ctr">
+              <a:defRPr sz="1700" b="1">
+                <a:solidFill>
+                  <a:srgbClr val="111111"/>
+                </a:solidFill>
+                <a:latin typeface="Arial"/>
+              </a:defRPr>
+            </a:pPr>
+            <a:r>
+              <a:t>Prévision des scores</a:t>
+            </a:r>
+          </a:p>
+        </p:txBody>
+      </p:sp>
+      <p:pic>
+        <p:nvPicPr>
+          <p:cNvPr id="9" name="Picture 8" descr="eq_var.png"/>
+          <p:cNvPicPr>
+            <a:picLocks noChangeAspect="1"/>
+          </p:cNvPicPr>
+          <p:nvPr/>
+        </p:nvPicPr>
+        <p:blipFill>
+          <a:blip r:embed="rId3"/>
+          <a:stretch>
+            <a:fillRect/>
+          </a:stretch>
+        </p:blipFill>
+        <p:spPr>
+          <a:xfrm>
+            <a:off x="7495824" y="1481328"/>
+            <a:ext cx="2656270" cy="749808"/>
+          </a:xfrm>
+          <a:prstGeom prst="rect">
+            <a:avLst/>
+          </a:prstGeom>
+        </p:spPr>
+      </p:pic>
+      <p:sp>
+        <p:nvSpPr>
+          <p:cNvPr id="10" name="TextBox 9"/>
+          <p:cNvSpPr txBox="1"/>
+          <p:nvPr/>
+        </p:nvSpPr>
+        <p:spPr>
+          <a:xfrm>
+            <a:off x="777240" y="2743200"/>
+            <a:ext cx="5257800" cy="2148840"/>
+          </a:xfrm>
+          <a:prstGeom prst="rect">
+            <a:avLst/>
+          </a:prstGeom>
+          <a:noFill/>
+        </p:spPr>
+        <p:txBody>
+          <a:bodyPr wrap="square" lIns="18288" rIns="0">
             <a:spAutoFit/>
           </a:bodyPr>
           <a:lstStyle/>
@@ -3489,15 +3647,15 @@
               <a:spcAft>
                 <a:spcPts val="1000"/>
               </a:spcAft>
-              <a:defRPr sz="1800">
-                <a:solidFill>
-                  <a:srgbClr val="24323D"/>
-                </a:solidFill>
-                <a:latin typeface="Arial"/>
-              </a:defRPr>
-            </a:pPr>
-            <a:r>
-              <a:t>• Obtenir un historique SPX quotidien à maturité ≈ 3 mois.</a:t>
+              <a:defRPr sz="1500">
+                <a:solidFill>
+                  <a:srgbClr val="27313A"/>
+                </a:solidFill>
+                <a:latin typeface="Arial"/>
+              </a:defRPr>
+            </a:pPr>
+            <a:r>
+              <a:t>• Une RND quotidienne à maturité constante, extraite de l’historique Bloomberg.</a:t>
             </a:r>
           </a:p>
           <a:p>
@@ -3505,15 +3663,15 @@
               <a:spcAft>
                 <a:spcPts val="1000"/>
               </a:spcAft>
-              <a:defRPr sz="1800">
-                <a:solidFill>
-                  <a:srgbClr val="24323D"/>
-                </a:solidFill>
-                <a:latin typeface="Arial"/>
-              </a:defRPr>
-            </a:pPr>
-            <a:r>
-              <a:t>• Comparer BL, Fourier-cosinus et distorsion historique.</a:t>
+              <a:defRPr sz="1500">
+                <a:solidFill>
+                  <a:srgbClr val="27313A"/>
+                </a:solidFill>
+                <a:latin typeface="Arial"/>
+              </a:defRPr>
+            </a:pPr>
+            <a:r>
+              <a:t>• Comparaison : marche aléatoire fonctionnelle, AR et VAR.</a:t>
             </a:r>
           </a:p>
           <a:p>
@@ -3521,31 +3679,54 @@
               <a:spcAft>
                 <a:spcPts val="1000"/>
               </a:spcAft>
-              <a:defRPr sz="1800">
-                <a:solidFill>
-                  <a:srgbClr val="24323D"/>
-                </a:solidFill>
-                <a:latin typeface="Arial"/>
-              </a:defRPr>
-            </a:pPr>
-            <a:r>
-              <a:t>• Mesurer stabilité : KL, Jensen–Shannon, Wasserstein.</a:t>
-            </a:r>
-          </a:p>
+              <a:defRPr sz="1500">
+                <a:solidFill>
+                  <a:srgbClr val="27313A"/>
+                </a:solidFill>
+                <a:latin typeface="Arial"/>
+              </a:defRPr>
+            </a:pPr>
+            <a:r>
+              <a:t>• Distances : Jensen–Shannon, Wasserstein et erreur de pricing.</a:t>
+            </a:r>
+          </a:p>
+        </p:txBody>
+      </p:sp>
+      <p:sp>
+        <p:nvSpPr>
+          <p:cNvPr id="11" name="TextBox 10"/>
+          <p:cNvSpPr txBox="1"/>
+          <p:nvPr/>
+        </p:nvSpPr>
+        <p:spPr>
+          <a:xfrm>
+            <a:off x="6199632" y="2743200"/>
+            <a:ext cx="5212080" cy="2148840"/>
+          </a:xfrm>
+          <a:prstGeom prst="rect">
+            <a:avLst/>
+          </a:prstGeom>
+          <a:noFill/>
+        </p:spPr>
+        <p:txBody>
+          <a:bodyPr wrap="square" lIns="18288" rIns="0">
+            <a:spAutoFit/>
+          </a:bodyPr>
+          <a:lstStyle/>
           <a:p>
             <a:pPr>
               <a:spcAft>
                 <a:spcPts val="1000"/>
               </a:spcAft>
-              <a:defRPr sz="1800">
-                <a:solidFill>
-                  <a:srgbClr val="24323D"/>
-                </a:solidFill>
-                <a:latin typeface="Arial"/>
-              </a:defRPr>
-            </a:pPr>
-            <a:r>
-              <a:t>• Réduire les RND en facteurs, puis prévoir par AR/VAR.</a:t>
+              <a:defRPr sz="1500">
+                <a:solidFill>
+                  <a:srgbClr val="27313A"/>
+                </a:solidFill>
+                <a:latin typeface="Arial"/>
+              </a:defRPr>
+            </a:pPr>
+            <a:r>
+              <a:t>• Couverture RND courante vs RND prévue vs Black–Scholes.</a:t>
             </a:r>
           </a:p>
           <a:p>
@@ -3553,122 +3734,105 @@
               <a:spcAft>
                 <a:spcPts val="1000"/>
               </a:spcAft>
-              <a:defRPr sz="1800">
-                <a:solidFill>
-                  <a:srgbClr val="24323D"/>
-                </a:solidFill>
-                <a:latin typeface="Arial"/>
-              </a:defRPr>
-            </a:pPr>
-            <a:r>
-              <a:t>• Comparer les erreurs de couverture nettes de coûts.</a:t>
-            </a:r>
-          </a:p>
-        </p:txBody>
-      </p:sp>
-      <p:sp>
-        <p:nvSpPr>
-          <p:cNvPr id="7" name="TextBox 6"/>
-          <p:cNvSpPr txBox="1"/>
-          <p:nvPr/>
-        </p:nvSpPr>
-        <p:spPr>
-          <a:xfrm>
-            <a:off x="6675120" y="1463040"/>
-            <a:ext cx="4480560" cy="3200400"/>
-          </a:xfrm>
-          <a:prstGeom prst="rect">
-            <a:avLst/>
-          </a:prstGeom>
-          <a:noFill/>
-        </p:spPr>
-        <p:txBody>
-          <a:bodyPr wrap="square" lIns="45720" rIns="27432">
-            <a:spAutoFit/>
-          </a:bodyPr>
-          <a:lstStyle/>
+              <a:defRPr sz="1500">
+                <a:solidFill>
+                  <a:srgbClr val="27313A"/>
+                </a:solidFill>
+                <a:latin typeface="Arial"/>
+              </a:defRPr>
+            </a:pPr>
+            <a:r>
+              <a:t>• Évaluation hors échantillon : erreur de couverture, variance, drawdown.</a:t>
+            </a:r>
+          </a:p>
           <a:p>
             <a:pPr>
               <a:spcAft>
                 <a:spcPts val="1000"/>
               </a:spcAft>
-              <a:defRPr sz="1900">
-                <a:solidFill>
-                  <a:srgbClr val="153A5B"/>
-                </a:solidFill>
-                <a:latin typeface="Arial"/>
-              </a:defRPr>
-            </a:pPr>
-            <a:r>
-              <a:t>• Accès historique à utiliser ?</a:t>
-            </a:r>
-          </a:p>
-          <a:p>
-            <a:pPr>
-              <a:spcAft>
-                <a:spcPts val="1000"/>
-              </a:spcAft>
-              <a:defRPr sz="1900">
-                <a:solidFill>
-                  <a:srgbClr val="153A5B"/>
-                </a:solidFill>
-                <a:latin typeface="Arial"/>
-              </a:defRPr>
-            </a:pPr>
-            <a:r>
-              <a:t>• Maturité constante validée ?</a:t>
-            </a:r>
-          </a:p>
-          <a:p>
-            <a:pPr>
-              <a:spcAft>
-                <a:spcPts val="1000"/>
-              </a:spcAft>
-              <a:defRPr sz="1900">
-                <a:solidFill>
-                  <a:srgbClr val="153A5B"/>
-                </a:solidFill>
-                <a:latin typeface="Arial"/>
-              </a:defRPr>
-            </a:pPr>
-            <a:r>
-              <a:t>• Trois méthodes intégrales attendues ?</a:t>
-            </a:r>
-          </a:p>
-          <a:p>
-            <a:pPr>
-              <a:spcAft>
-                <a:spcPts val="1000"/>
-              </a:spcAft>
-              <a:defRPr sz="1900">
-                <a:solidFill>
-                  <a:srgbClr val="153A5B"/>
-                </a:solidFill>
-                <a:latin typeface="Arial"/>
-              </a:defRPr>
-            </a:pPr>
-            <a:r>
-              <a:t>• Couverture prioritaire au trading ?</a:t>
-            </a:r>
-          </a:p>
-        </p:txBody>
-      </p:sp>
-      <p:sp>
-        <p:nvSpPr>
-          <p:cNvPr id="8" name="Rounded Rectangle 7"/>
+              <a:defRPr sz="1500">
+                <a:solidFill>
+                  <a:srgbClr val="27313A"/>
+                </a:solidFill>
+                <a:latin typeface="Arial"/>
+              </a:defRPr>
+            </a:pPr>
+            <a:r>
+              <a:t>• Résultats nets des coûts de transaction.</a:t>
+            </a:r>
+          </a:p>
+        </p:txBody>
+      </p:sp>
+      <p:sp>
+        <p:nvSpPr>
+          <p:cNvPr id="12" name="TextBox 11"/>
+          <p:cNvSpPr txBox="1"/>
+          <p:nvPr/>
+        </p:nvSpPr>
+        <p:spPr>
+          <a:xfrm>
+            <a:off x="1005840" y="5596128"/>
+            <a:ext cx="10149840" cy="411480"/>
+          </a:xfrm>
+          <a:prstGeom prst="rect">
+            <a:avLst/>
+          </a:prstGeom>
+          <a:noFill/>
+        </p:spPr>
+        <p:txBody>
+          <a:bodyPr wrap="square" lIns="0" rIns="0">
+            <a:spAutoFit/>
+          </a:bodyPr>
+          <a:lstStyle/>
+          <a:p>
+            <a:pPr algn="ctr">
+              <a:defRPr sz="1700" b="1">
+                <a:solidFill>
+                  <a:srgbClr val="111111"/>
+                </a:solidFill>
+                <a:latin typeface="Arial"/>
+              </a:defRPr>
+            </a:pPr>
+            <a:r>
+              <a:t>Cboe gratuit pour le prototype ; Bloomberg pour l’historique et le backtest.</a:t>
+            </a:r>
+          </a:p>
+        </p:txBody>
+      </p:sp>
+    </p:spTree>
+  </p:cSld>
+  <p:clrMapOvr>
+    <a:masterClrMapping/>
+  </p:clrMapOvr>
+</p:sld>
+</file>
+
+<file path=ppt/slides/slide11.xml><?xml version="1.0" encoding="utf-8"?>
+<p:sld xmlns:a="http://schemas.openxmlformats.org/drawingml/2006/main" xmlns:p="http://schemas.openxmlformats.org/presentationml/2006/main" xmlns:r="http://schemas.openxmlformats.org/officeDocument/2006/relationships">
+  <p:cSld>
+    <p:spTree>
+      <p:nvGrpSpPr>
+        <p:cNvPr id="1" name=""/>
+        <p:cNvGrpSpPr/>
+        <p:nvPr/>
+      </p:nvGrpSpPr>
+      <p:grpSpPr/>
+      <p:sp>
+        <p:nvSpPr>
+          <p:cNvPr id="2" name="Rectangle 1"/>
           <p:cNvSpPr/>
           <p:nvPr/>
         </p:nvSpPr>
         <p:spPr>
           <a:xfrm>
-            <a:off x="6720840" y="4709160"/>
-            <a:ext cx="4297680" cy="868680"/>
-          </a:xfrm>
-          <a:prstGeom prst="roundRect">
+            <a:off x="0" y="0"/>
+            <a:ext cx="12191695" cy="6858000"/>
+          </a:xfrm>
+          <a:prstGeom prst="rect">
             <a:avLst/>
           </a:prstGeom>
           <a:solidFill>
-            <a:srgbClr val="E07A3F"/>
+            <a:srgbClr val="FFFFFF"/>
           </a:solidFill>
           <a:ln>
             <a:noFill/>
@@ -3692,16 +3856,419 @@
           <a:bodyPr rtlCol="0" anchor="ctr"/>
           <a:lstStyle/>
           <a:p>
+            <a:pPr algn="ctr"/>
+          </a:p>
+        </p:txBody>
+      </p:sp>
+      <p:sp>
+        <p:nvSpPr>
+          <p:cNvPr id="3" name="Rectangle 2"/>
+          <p:cNvSpPr/>
+          <p:nvPr/>
+        </p:nvSpPr>
+        <p:spPr>
+          <a:xfrm>
+            <a:off x="530352" y="868680"/>
+            <a:ext cx="11109960" cy="16459"/>
+          </a:xfrm>
+          <a:prstGeom prst="rect">
+            <a:avLst/>
+          </a:prstGeom>
+          <a:solidFill>
+            <a:srgbClr val="111111"/>
+          </a:solidFill>
+          <a:ln>
+            <a:noFill/>
+          </a:ln>
+        </p:spPr>
+        <p:style>
+          <a:lnRef idx="1">
+            <a:schemeClr val="accent1"/>
+          </a:lnRef>
+          <a:fillRef idx="3">
+            <a:schemeClr val="accent1"/>
+          </a:fillRef>
+          <a:effectRef idx="2">
+            <a:schemeClr val="accent1"/>
+          </a:effectRef>
+          <a:fontRef idx="minor">
+            <a:schemeClr val="lt1"/>
+          </a:fontRef>
+        </p:style>
+        <p:txBody>
+          <a:bodyPr rtlCol="0" anchor="ctr"/>
+          <a:lstStyle/>
+          <a:p>
+            <a:pPr algn="ctr"/>
+          </a:p>
+        </p:txBody>
+      </p:sp>
+      <p:sp>
+        <p:nvSpPr>
+          <p:cNvPr id="4" name="TextBox 3"/>
+          <p:cNvSpPr txBox="1"/>
+          <p:nvPr/>
+        </p:nvSpPr>
+        <p:spPr>
+          <a:xfrm>
+            <a:off x="566928" y="274320"/>
+            <a:ext cx="10881360" cy="502920"/>
+          </a:xfrm>
+          <a:prstGeom prst="rect">
+            <a:avLst/>
+          </a:prstGeom>
+          <a:noFill/>
+        </p:spPr>
+        <p:txBody>
+          <a:bodyPr wrap="none">
+            <a:spAutoFit/>
+          </a:bodyPr>
+          <a:lstStyle/>
+          <a:p>
+            <a:pPr>
+              <a:defRPr b="1" sz="2500">
+                <a:solidFill>
+                  <a:srgbClr val="111111"/>
+                </a:solidFill>
+                <a:latin typeface="Arial"/>
+              </a:defRPr>
+            </a:pPr>
+            <a:r>
+              <a:t>10. Résultats acquis et prochain jalon</a:t>
+            </a:r>
+          </a:p>
+        </p:txBody>
+      </p:sp>
+      <p:sp>
+        <p:nvSpPr>
+          <p:cNvPr id="5" name="TextBox 4"/>
+          <p:cNvSpPr txBox="1"/>
+          <p:nvPr/>
+        </p:nvSpPr>
+        <p:spPr>
+          <a:xfrm>
+            <a:off x="566928" y="6510528"/>
+            <a:ext cx="10972800" cy="164592"/>
+          </a:xfrm>
+          <a:prstGeom prst="rect">
+            <a:avLst/>
+          </a:prstGeom>
+          <a:noFill/>
+        </p:spPr>
+        <p:txBody>
+          <a:bodyPr wrap="none">
+            <a:spAutoFit/>
+          </a:bodyPr>
+          <a:lstStyle/>
+          <a:p>
+            <a:pPr>
+              <a:defRPr sz="800">
+                <a:solidFill>
+                  <a:srgbClr val="59636C"/>
+                </a:solidFill>
+                <a:latin typeface="Arial"/>
+              </a:defRPr>
+            </a:pPr>
+            <a:r>
+              <a:t>Projet PI² n°176  ·  Suivi n°1  ·  23 octobre 2026                                      11/11</a:t>
+            </a:r>
+          </a:p>
+        </p:txBody>
+      </p:sp>
+      <p:sp>
+        <p:nvSpPr>
+          <p:cNvPr id="6" name="TextBox 5"/>
+          <p:cNvSpPr txBox="1"/>
+          <p:nvPr/>
+        </p:nvSpPr>
+        <p:spPr>
+          <a:xfrm>
+            <a:off x="822960" y="1143000"/>
+            <a:ext cx="5029200" cy="365760"/>
+          </a:xfrm>
+          <a:prstGeom prst="rect">
+            <a:avLst/>
+          </a:prstGeom>
+          <a:noFill/>
+        </p:spPr>
+        <p:txBody>
+          <a:bodyPr wrap="square" lIns="0" rIns="0">
+            <a:spAutoFit/>
+          </a:bodyPr>
+          <a:lstStyle/>
+          <a:p>
+            <a:pPr algn="l">
+              <a:defRPr sz="2000" b="1">
+                <a:solidFill>
+                  <a:srgbClr val="111111"/>
+                </a:solidFill>
+                <a:latin typeface="Arial"/>
+              </a:defRPr>
+            </a:pPr>
+            <a:r>
+              <a:t>Acquis</a:t>
+            </a:r>
+          </a:p>
+        </p:txBody>
+      </p:sp>
+      <p:sp>
+        <p:nvSpPr>
+          <p:cNvPr id="7" name="TextBox 6"/>
+          <p:cNvSpPr txBox="1"/>
+          <p:nvPr/>
+        </p:nvSpPr>
+        <p:spPr>
+          <a:xfrm>
+            <a:off x="822960" y="1719072"/>
+            <a:ext cx="5120640" cy="3520440"/>
+          </a:xfrm>
+          <a:prstGeom prst="rect">
+            <a:avLst/>
+          </a:prstGeom>
+          <a:noFill/>
+        </p:spPr>
+        <p:txBody>
+          <a:bodyPr wrap="square" lIns="18288" rIns="0">
+            <a:spAutoFit/>
+          </a:bodyPr>
+          <a:lstStyle/>
+          <a:p>
+            <a:pPr>
+              <a:spcAft>
+                <a:spcPts val="1000"/>
+              </a:spcAft>
+              <a:defRPr sz="1600">
+                <a:solidFill>
+                  <a:srgbClr val="27313A"/>
+                </a:solidFill>
+                <a:latin typeface="Arial"/>
+              </a:defRPr>
+            </a:pPr>
+            <a:r>
+              <a:t>• Chaîne SPX réelle nettoyée et documentée.</a:t>
+            </a:r>
+          </a:p>
+          <a:p>
+            <a:pPr>
+              <a:spcAft>
+                <a:spcPts val="1000"/>
+              </a:spcAft>
+              <a:defRPr sz="1600">
+                <a:solidFill>
+                  <a:srgbClr val="27313A"/>
+                </a:solidFill>
+                <a:latin typeface="Arial"/>
+              </a:defRPr>
+            </a:pPr>
+            <a:r>
+              <a:t>• Forward, actualisation et SVI estimés sur 338 points.</a:t>
+            </a:r>
+          </a:p>
+          <a:p>
+            <a:pPr>
+              <a:spcAft>
+                <a:spcPts val="1000"/>
+              </a:spcAft>
+              <a:defRPr sz="1600">
+                <a:solidFill>
+                  <a:srgbClr val="27313A"/>
+                </a:solidFill>
+                <a:latin typeface="Arial"/>
+              </a:defRPr>
+            </a:pPr>
+            <a:r>
+              <a:t>• RND Breeden–Litzenberger contrôlée à 91 jours.</a:t>
+            </a:r>
+          </a:p>
+          <a:p>
+            <a:pPr>
+              <a:spcAft>
+                <a:spcPts val="1000"/>
+              </a:spcAft>
+              <a:defRPr sz="1600">
+                <a:solidFill>
+                  <a:srgbClr val="27313A"/>
+                </a:solidFill>
+                <a:latin typeface="Arial"/>
+              </a:defRPr>
+            </a:pPr>
+            <a:r>
+              <a:t>• Structure par terme et limites identifiées.</a:t>
+            </a:r>
+          </a:p>
+          <a:p>
+            <a:pPr>
+              <a:spcAft>
+                <a:spcPts val="1000"/>
+              </a:spcAft>
+              <a:defRPr sz="1600">
+                <a:solidFill>
+                  <a:srgbClr val="27313A"/>
+                </a:solidFill>
+                <a:latin typeface="Arial"/>
+              </a:defRPr>
+            </a:pPr>
+            <a:r>
+              <a:t>• Python–Julia : écart moyen 3,4 × 10⁻⁹ ; maximum 2,2 × 10⁻⁶.</a:t>
+            </a:r>
+          </a:p>
+        </p:txBody>
+      </p:sp>
+      <p:sp>
+        <p:nvSpPr>
+          <p:cNvPr id="8" name="TextBox 7"/>
+          <p:cNvSpPr txBox="1"/>
+          <p:nvPr/>
+        </p:nvSpPr>
+        <p:spPr>
+          <a:xfrm>
+            <a:off x="6263640" y="1143000"/>
+            <a:ext cx="5029200" cy="365760"/>
+          </a:xfrm>
+          <a:prstGeom prst="rect">
+            <a:avLst/>
+          </a:prstGeom>
+          <a:noFill/>
+        </p:spPr>
+        <p:txBody>
+          <a:bodyPr wrap="square" lIns="0" rIns="0">
+            <a:spAutoFit/>
+          </a:bodyPr>
+          <a:lstStyle/>
+          <a:p>
+            <a:pPr algn="l">
+              <a:defRPr sz="2000" b="1">
+                <a:solidFill>
+                  <a:srgbClr val="111111"/>
+                </a:solidFill>
+                <a:latin typeface="Arial"/>
+              </a:defRPr>
+            </a:pPr>
+            <a:r>
+              <a:t>Prochain jalon</a:t>
+            </a:r>
+          </a:p>
+        </p:txBody>
+      </p:sp>
+      <p:sp>
+        <p:nvSpPr>
+          <p:cNvPr id="9" name="TextBox 8"/>
+          <p:cNvSpPr txBox="1"/>
+          <p:nvPr/>
+        </p:nvSpPr>
+        <p:spPr>
+          <a:xfrm>
+            <a:off x="6263640" y="1719072"/>
+            <a:ext cx="5074920" cy="2971800"/>
+          </a:xfrm>
+          <a:prstGeom prst="rect">
+            <a:avLst/>
+          </a:prstGeom>
+          <a:noFill/>
+        </p:spPr>
+        <p:txBody>
+          <a:bodyPr wrap="square" lIns="18288" rIns="0">
+            <a:spAutoFit/>
+          </a:bodyPr>
+          <a:lstStyle/>
+          <a:p>
+            <a:pPr>
+              <a:spcAft>
+                <a:spcPts val="1000"/>
+              </a:spcAft>
+              <a:defRPr sz="1600">
+                <a:solidFill>
+                  <a:srgbClr val="27313A"/>
+                </a:solidFill>
+                <a:latin typeface="Arial"/>
+              </a:defRPr>
+            </a:pPr>
+            <a:r>
+              <a:t>• Sécuriser l’export historique Bloomberg.</a:t>
+            </a:r>
+          </a:p>
+          <a:p>
+            <a:pPr>
+              <a:spcAft>
+                <a:spcPts val="1000"/>
+              </a:spcAft>
+              <a:defRPr sz="1600">
+                <a:solidFill>
+                  <a:srgbClr val="27313A"/>
+                </a:solidFill>
+                <a:latin typeface="Arial"/>
+              </a:defRPr>
+            </a:pPr>
+            <a:r>
+              <a:t>• Construire les RND à maturité constante.</a:t>
+            </a:r>
+          </a:p>
+          <a:p>
+            <a:pPr>
+              <a:spcAft>
+                <a:spcPts val="1000"/>
+              </a:spcAft>
+              <a:defRPr sz="1600">
+                <a:solidFill>
+                  <a:srgbClr val="27313A"/>
+                </a:solidFill>
+                <a:latin typeface="Arial"/>
+              </a:defRPr>
+            </a:pPr>
+            <a:r>
+              <a:t>• Comparer BL, COS et repondération entropique.</a:t>
+            </a:r>
+          </a:p>
+          <a:p>
+            <a:pPr>
+              <a:spcAft>
+                <a:spcPts val="1000"/>
+              </a:spcAft>
+              <a:defRPr sz="1600">
+                <a:solidFill>
+                  <a:srgbClr val="27313A"/>
+                </a:solidFill>
+                <a:latin typeface="Arial"/>
+              </a:defRPr>
+            </a:pPr>
+            <a:r>
+              <a:t>• Estimer les facteurs puis réaliser le backtest.</a:t>
+            </a:r>
+          </a:p>
+        </p:txBody>
+      </p:sp>
+      <p:sp>
+        <p:nvSpPr>
+          <p:cNvPr id="10" name="TextBox 9"/>
+          <p:cNvSpPr txBox="1"/>
+          <p:nvPr/>
+        </p:nvSpPr>
+        <p:spPr>
+          <a:xfrm>
+            <a:off x="914400" y="5577840"/>
+            <a:ext cx="10287000" cy="502920"/>
+          </a:xfrm>
+          <a:prstGeom prst="rect">
+            <a:avLst/>
+          </a:prstGeom>
+          <a:noFill/>
+        </p:spPr>
+        <p:txBody>
+          <a:bodyPr wrap="square" lIns="0" rIns="0">
+            <a:spAutoFit/>
+          </a:bodyPr>
+          <a:lstStyle/>
+          <a:p>
             <a:pPr algn="ctr">
-              <a:defRPr b="1" sz="1700">
-                <a:solidFill>
-                  <a:srgbClr val="FFFFFF"/>
-                </a:solidFill>
-                <a:latin typeface="Arial"/>
-              </a:defRPr>
-            </a:pPr>
-            <a:r>
-              <a:t>Objectif suivant : une série temporelle de RND comparables</a:t>
+              <a:defRPr sz="1800" b="1">
+                <a:solidFill>
+                  <a:srgbClr val="315B78"/>
+                </a:solidFill>
+                <a:latin typeface="Arial"/>
+              </a:defRPr>
+            </a:pPr>
+            <a:r>
+              <a:t>Décision attendue : horizon constant retenu et protocole d’accès Bloomberg.</a:t>
             </a:r>
           </a:p>
         </p:txBody>
@@ -3775,14 +4342,14 @@
         </p:nvSpPr>
         <p:spPr>
           <a:xfrm>
-            <a:off x="0" y="0"/>
-            <a:ext cx="12191695" cy="164592"/>
+            <a:off x="530352" y="868680"/>
+            <a:ext cx="11109960" cy="16459"/>
           </a:xfrm>
           <a:prstGeom prst="rect">
             <a:avLst/>
           </a:prstGeom>
           <a:solidFill>
-            <a:srgbClr val="153A5B"/>
+            <a:srgbClr val="111111"/>
           </a:solidFill>
           <a:ln>
             <a:noFill/>
@@ -3818,8 +4385,8 @@
         </p:nvSpPr>
         <p:spPr>
           <a:xfrm>
-            <a:off x="594360" y="347472"/>
-            <a:ext cx="10881360" cy="566928"/>
+            <a:off x="566928" y="274320"/>
+            <a:ext cx="10881360" cy="502920"/>
           </a:xfrm>
           <a:prstGeom prst="rect">
             <a:avLst/>
@@ -3835,13 +4402,13 @@
             <a:pPr>
               <a:defRPr b="1" sz="2500">
                 <a:solidFill>
-                  <a:srgbClr val="153A5B"/>
-                </a:solidFill>
-                <a:latin typeface="Arial"/>
-              </a:defRPr>
-            </a:pPr>
-            <a:r>
-              <a:t>1. Problématique</a:t>
+                  <a:srgbClr val="111111"/>
+                </a:solidFill>
+                <a:latin typeface="Arial"/>
+              </a:defRPr>
+            </a:pPr>
+            <a:r>
+              <a:t>1. Question de recherche et protocole</a:t>
             </a:r>
           </a:p>
         </p:txBody>
@@ -3854,8 +4421,8 @@
         </p:nvSpPr>
         <p:spPr>
           <a:xfrm>
-            <a:off x="594360" y="6510528"/>
-            <a:ext cx="10972800" cy="182880"/>
+            <a:off x="566928" y="6510528"/>
+            <a:ext cx="10972800" cy="164592"/>
           </a:xfrm>
           <a:prstGeom prst="rect">
             <a:avLst/>
@@ -3871,13 +4438,13 @@
             <a:pPr>
               <a:defRPr sz="800">
                 <a:solidFill>
-                  <a:srgbClr val="60717D"/>
-                </a:solidFill>
-                <a:latin typeface="Arial"/>
-              </a:defRPr>
-            </a:pPr>
-            <a:r>
-              <a:t>Projet PI² n°176 — Suivi n°1     2/10</a:t>
+                  <a:srgbClr val="59636C"/>
+                </a:solidFill>
+                <a:latin typeface="Arial"/>
+              </a:defRPr>
+            </a:pPr>
+            <a:r>
+              <a:t>Projet PI² n°176  ·  Suivi n°1  ·  23 octobre 2026                                      2/11</a:t>
             </a:r>
           </a:p>
         </p:txBody>
@@ -3890,8 +4457,8 @@
         </p:nvSpPr>
         <p:spPr>
           <a:xfrm>
-            <a:off x="731520" y="1234440"/>
-            <a:ext cx="5212080" cy="4297680"/>
+            <a:off x="822960" y="1170432"/>
+            <a:ext cx="10607040" cy="777240"/>
           </a:xfrm>
           <a:prstGeom prst="rect">
             <a:avLst/>
@@ -3899,503 +4466,405 @@
           <a:noFill/>
         </p:spPr>
         <p:txBody>
-          <a:bodyPr wrap="square" lIns="45720" rIns="27432">
+          <a:bodyPr wrap="square" lIns="0" rIns="0">
             <a:spAutoFit/>
           </a:bodyPr>
           <a:lstStyle/>
           <a:p>
-            <a:pPr>
-              <a:spcAft>
-                <a:spcPts val="1000"/>
-              </a:spcAft>
-              <a:defRPr sz="2000">
-                <a:solidFill>
-                  <a:srgbClr val="24323D"/>
-                </a:solidFill>
-                <a:latin typeface="Arial"/>
-              </a:defRPr>
-            </a:pPr>
-            <a:r>
-              <a:t>• Une volatilité Black–Scholes unique ne reproduit pas toute la chaîne d’options.</a:t>
-            </a:r>
-          </a:p>
-          <a:p>
-            <a:pPr>
-              <a:spcAft>
-                <a:spcPts val="1000"/>
-              </a:spcAft>
-              <a:defRPr sz="2000">
-                <a:solidFill>
-                  <a:srgbClr val="24323D"/>
-                </a:solidFill>
-                <a:latin typeface="Arial"/>
-              </a:defRPr>
-            </a:pPr>
-            <a:r>
-              <a:t>• Chaque volatilité implicite ajuste un contrat, mais le smile exige une distribution commune.</a:t>
-            </a:r>
-          </a:p>
-          <a:p>
-            <a:pPr>
-              <a:spcAft>
-                <a:spcPts val="1000"/>
-              </a:spcAft>
-              <a:defRPr sz="2000">
-                <a:solidFill>
-                  <a:srgbClr val="24323D"/>
-                </a:solidFill>
-                <a:latin typeface="Arial"/>
-              </a:defRPr>
-            </a:pPr>
-            <a:r>
-              <a:t>• Objectif : estimer, suivre et prévoir la RND, puis l’utiliser pour la couverture.</a:t>
-            </a:r>
-          </a:p>
-        </p:txBody>
-      </p:sp>
-      <p:sp>
-        <p:nvSpPr>
-          <p:cNvPr id="7" name="Rounded Rectangle 6"/>
-          <p:cNvSpPr/>
-          <p:nvPr/>
-        </p:nvSpPr>
-        <p:spPr>
-          <a:xfrm>
-            <a:off x="6126480" y="2057400"/>
-            <a:ext cx="960120" cy="914400"/>
-          </a:xfrm>
-          <a:prstGeom prst="roundRect">
-            <a:avLst/>
-          </a:prstGeom>
-          <a:solidFill>
-            <a:srgbClr val="EAF2F6"/>
-          </a:solidFill>
-          <a:ln>
-            <a:solidFill>
-              <a:srgbClr val="168AAD"/>
-            </a:solidFill>
-          </a:ln>
-        </p:spPr>
-        <p:style>
-          <a:lnRef idx="1">
-            <a:schemeClr val="accent1"/>
-          </a:lnRef>
-          <a:fillRef idx="3">
-            <a:schemeClr val="accent1"/>
-          </a:fillRef>
-          <a:effectRef idx="2">
-            <a:schemeClr val="accent1"/>
-          </a:effectRef>
-          <a:fontRef idx="minor">
-            <a:schemeClr val="lt1"/>
-          </a:fontRef>
-        </p:style>
-        <p:txBody>
-          <a:bodyPr rtlCol="0" anchor="ctr"/>
-          <a:lstStyle/>
-          <a:p>
             <a:pPr algn="ctr">
-              <a:defRPr b="1" sz="1100">
-                <a:solidFill>
-                  <a:srgbClr val="153A5B"/>
-                </a:solidFill>
-                <a:latin typeface="Arial"/>
-              </a:defRPr>
-            </a:pPr>
-            <a:r>
-              <a:t>Options</a:t>
-            </a:r>
-          </a:p>
-        </p:txBody>
-      </p:sp>
-      <p:sp>
-        <p:nvSpPr>
-          <p:cNvPr id="8" name="Right Arrow 7"/>
-          <p:cNvSpPr/>
-          <p:nvPr/>
-        </p:nvSpPr>
-        <p:spPr>
-          <a:xfrm>
-            <a:off x="7086600" y="2331720"/>
-            <a:ext cx="201168" cy="320040"/>
-          </a:xfrm>
-          <a:prstGeom prst="rightArrow">
-            <a:avLst/>
-          </a:prstGeom>
-          <a:solidFill>
-            <a:srgbClr val="E07A3F"/>
-          </a:solidFill>
-          <a:ln>
-            <a:noFill/>
-          </a:ln>
-        </p:spPr>
-        <p:style>
-          <a:lnRef idx="1">
-            <a:schemeClr val="accent1"/>
-          </a:lnRef>
-          <a:fillRef idx="3">
-            <a:schemeClr val="accent1"/>
-          </a:fillRef>
-          <a:effectRef idx="2">
-            <a:schemeClr val="accent1"/>
-          </a:effectRef>
-          <a:fontRef idx="minor">
-            <a:schemeClr val="lt1"/>
-          </a:fontRef>
-        </p:style>
-        <p:txBody>
-          <a:bodyPr rtlCol="0" anchor="ctr"/>
-          <a:lstStyle/>
-          <a:p>
-            <a:pPr algn="ctr"/>
-          </a:p>
-        </p:txBody>
-      </p:sp>
-      <p:sp>
-        <p:nvSpPr>
-          <p:cNvPr id="9" name="Rounded Rectangle 8"/>
-          <p:cNvSpPr/>
-          <p:nvPr/>
-        </p:nvSpPr>
-        <p:spPr>
-          <a:xfrm>
-            <a:off x="7251192" y="2057400"/>
-            <a:ext cx="960120" cy="914400"/>
-          </a:xfrm>
-          <a:prstGeom prst="roundRect">
-            <a:avLst/>
-          </a:prstGeom>
-          <a:solidFill>
-            <a:srgbClr val="EAF2F6"/>
-          </a:solidFill>
-          <a:ln>
-            <a:solidFill>
-              <a:srgbClr val="168AAD"/>
-            </a:solidFill>
-          </a:ln>
-        </p:spPr>
-        <p:style>
-          <a:lnRef idx="1">
-            <a:schemeClr val="accent1"/>
-          </a:lnRef>
-          <a:fillRef idx="3">
-            <a:schemeClr val="accent1"/>
-          </a:fillRef>
-          <a:effectRef idx="2">
-            <a:schemeClr val="accent1"/>
-          </a:effectRef>
-          <a:fontRef idx="minor">
-            <a:schemeClr val="lt1"/>
-          </a:fontRef>
-        </p:style>
-        <p:txBody>
-          <a:bodyPr rtlCol="0" anchor="ctr"/>
+              <a:defRPr sz="2300" b="1">
+                <a:solidFill>
+                  <a:srgbClr val="111111"/>
+                </a:solidFill>
+                <a:latin typeface="Arial"/>
+              </a:defRPr>
+            </a:pPr>
+            <a:r>
+              <a:t>Peut-on prévoir une densité risque-neutre suffisamment stable pour améliorer la valorisation ou la couverture d’options ?</a:t>
+            </a:r>
+          </a:p>
+        </p:txBody>
+      </p:sp>
+      <p:sp>
+        <p:nvSpPr>
+          <p:cNvPr id="7" name="TextBox 6"/>
+          <p:cNvSpPr txBox="1"/>
+          <p:nvPr/>
+        </p:nvSpPr>
+        <p:spPr>
+          <a:xfrm>
+            <a:off x="685800" y="2331720"/>
+            <a:ext cx="3383280" cy="347472"/>
+          </a:xfrm>
+          <a:prstGeom prst="rect">
+            <a:avLst/>
+          </a:prstGeom>
+          <a:noFill/>
+        </p:spPr>
+        <p:txBody>
+          <a:bodyPr wrap="square" lIns="0" rIns="0">
+            <a:spAutoFit/>
+          </a:bodyPr>
           <a:lstStyle/>
           <a:p>
             <a:pPr algn="ctr">
-              <a:defRPr b="1" sz="1100">
-                <a:solidFill>
-                  <a:srgbClr val="153A5B"/>
-                </a:solidFill>
-                <a:latin typeface="Arial"/>
-              </a:defRPr>
-            </a:pPr>
-            <a:r>
-              <a:t>RND</a:t>
-            </a:r>
-          </a:p>
-        </p:txBody>
-      </p:sp>
-      <p:sp>
-        <p:nvSpPr>
-          <p:cNvPr id="10" name="Right Arrow 9"/>
-          <p:cNvSpPr/>
-          <p:nvPr/>
-        </p:nvSpPr>
-        <p:spPr>
-          <a:xfrm>
-            <a:off x="8211312" y="2331720"/>
-            <a:ext cx="201168" cy="320040"/>
-          </a:xfrm>
-          <a:prstGeom prst="rightArrow">
-            <a:avLst/>
-          </a:prstGeom>
-          <a:solidFill>
-            <a:srgbClr val="E07A3F"/>
-          </a:solidFill>
-          <a:ln>
-            <a:noFill/>
-          </a:ln>
-        </p:spPr>
-        <p:style>
-          <a:lnRef idx="1">
-            <a:schemeClr val="accent1"/>
-          </a:lnRef>
-          <a:fillRef idx="3">
-            <a:schemeClr val="accent1"/>
-          </a:fillRef>
-          <a:effectRef idx="2">
-            <a:schemeClr val="accent1"/>
-          </a:effectRef>
-          <a:fontRef idx="minor">
-            <a:schemeClr val="lt1"/>
-          </a:fontRef>
-        </p:style>
-        <p:txBody>
-          <a:bodyPr rtlCol="0" anchor="ctr"/>
-          <a:lstStyle/>
-          <a:p>
-            <a:pPr algn="ctr"/>
-          </a:p>
-        </p:txBody>
-      </p:sp>
-      <p:sp>
-        <p:nvSpPr>
-          <p:cNvPr id="11" name="Rounded Rectangle 10"/>
-          <p:cNvSpPr/>
-          <p:nvPr/>
-        </p:nvSpPr>
-        <p:spPr>
-          <a:xfrm>
-            <a:off x="8375904" y="2057400"/>
-            <a:ext cx="960120" cy="914400"/>
-          </a:xfrm>
-          <a:prstGeom prst="roundRect">
-            <a:avLst/>
-          </a:prstGeom>
-          <a:solidFill>
-            <a:srgbClr val="EAF2F6"/>
-          </a:solidFill>
-          <a:ln>
-            <a:solidFill>
-              <a:srgbClr val="168AAD"/>
-            </a:solidFill>
-          </a:ln>
-        </p:spPr>
-        <p:style>
-          <a:lnRef idx="1">
-            <a:schemeClr val="accent1"/>
-          </a:lnRef>
-          <a:fillRef idx="3">
-            <a:schemeClr val="accent1"/>
-          </a:fillRef>
-          <a:effectRef idx="2">
-            <a:schemeClr val="accent1"/>
-          </a:effectRef>
-          <a:fontRef idx="minor">
-            <a:schemeClr val="lt1"/>
-          </a:fontRef>
-        </p:style>
-        <p:txBody>
-          <a:bodyPr rtlCol="0" anchor="ctr"/>
+              <a:defRPr sz="1900" b="1">
+                <a:solidFill>
+                  <a:srgbClr val="111111"/>
+                </a:solidFill>
+                <a:latin typeface="Arial"/>
+              </a:defRPr>
+            </a:pPr>
+            <a:r>
+              <a:t>Estimation</a:t>
+            </a:r>
+          </a:p>
+        </p:txBody>
+      </p:sp>
+      <p:sp>
+        <p:nvSpPr>
+          <p:cNvPr id="8" name="TextBox 7"/>
+          <p:cNvSpPr txBox="1"/>
+          <p:nvPr/>
+        </p:nvSpPr>
+        <p:spPr>
+          <a:xfrm>
+            <a:off x="685800" y="2788920"/>
+            <a:ext cx="3383280" cy="548640"/>
+          </a:xfrm>
+          <a:prstGeom prst="rect">
+            <a:avLst/>
+          </a:prstGeom>
+          <a:noFill/>
+        </p:spPr>
+        <p:txBody>
+          <a:bodyPr wrap="square" lIns="0" rIns="0">
+            <a:spAutoFit/>
+          </a:bodyPr>
           <a:lstStyle/>
           <a:p>
             <a:pPr algn="ctr">
-              <a:defRPr b="1" sz="1100">
-                <a:solidFill>
-                  <a:srgbClr val="153A5B"/>
-                </a:solidFill>
-                <a:latin typeface="Arial"/>
-              </a:defRPr>
-            </a:pPr>
-            <a:r>
-              <a:t>Stabilité</a:t>
-            </a:r>
-          </a:p>
-        </p:txBody>
-      </p:sp>
-      <p:sp>
-        <p:nvSpPr>
-          <p:cNvPr id="12" name="Right Arrow 11"/>
-          <p:cNvSpPr/>
-          <p:nvPr/>
-        </p:nvSpPr>
-        <p:spPr>
-          <a:xfrm>
-            <a:off x="9336024" y="2331720"/>
-            <a:ext cx="201168" cy="320040"/>
-          </a:xfrm>
-          <a:prstGeom prst="rightArrow">
-            <a:avLst/>
-          </a:prstGeom>
-          <a:solidFill>
-            <a:srgbClr val="E07A3F"/>
-          </a:solidFill>
-          <a:ln>
-            <a:noFill/>
-          </a:ln>
-        </p:spPr>
-        <p:style>
-          <a:lnRef idx="1">
-            <a:schemeClr val="accent1"/>
-          </a:lnRef>
-          <a:fillRef idx="3">
-            <a:schemeClr val="accent1"/>
-          </a:fillRef>
-          <a:effectRef idx="2">
-            <a:schemeClr val="accent1"/>
-          </a:effectRef>
-          <a:fontRef idx="minor">
-            <a:schemeClr val="lt1"/>
-          </a:fontRef>
-        </p:style>
-        <p:txBody>
-          <a:bodyPr rtlCol="0" anchor="ctr"/>
-          <a:lstStyle/>
-          <a:p>
-            <a:pPr algn="ctr"/>
-          </a:p>
-        </p:txBody>
-      </p:sp>
-      <p:sp>
-        <p:nvSpPr>
-          <p:cNvPr id="13" name="Rounded Rectangle 12"/>
-          <p:cNvSpPr/>
-          <p:nvPr/>
-        </p:nvSpPr>
-        <p:spPr>
-          <a:xfrm>
-            <a:off x="9500616" y="2057400"/>
-            <a:ext cx="960120" cy="914400"/>
-          </a:xfrm>
-          <a:prstGeom prst="roundRect">
-            <a:avLst/>
-          </a:prstGeom>
-          <a:solidFill>
-            <a:srgbClr val="EAF2F6"/>
-          </a:solidFill>
-          <a:ln>
-            <a:solidFill>
-              <a:srgbClr val="168AAD"/>
-            </a:solidFill>
-          </a:ln>
-        </p:spPr>
-        <p:style>
-          <a:lnRef idx="1">
-            <a:schemeClr val="accent1"/>
-          </a:lnRef>
-          <a:fillRef idx="3">
-            <a:schemeClr val="accent1"/>
-          </a:fillRef>
-          <a:effectRef idx="2">
-            <a:schemeClr val="accent1"/>
-          </a:effectRef>
-          <a:fontRef idx="minor">
-            <a:schemeClr val="lt1"/>
-          </a:fontRef>
-        </p:style>
-        <p:txBody>
-          <a:bodyPr rtlCol="0" anchor="ctr"/>
+              <a:defRPr sz="1400" b="1">
+                <a:solidFill>
+                  <a:srgbClr val="315B78"/>
+                </a:solidFill>
+                <a:latin typeface="Arial"/>
+              </a:defRPr>
+            </a:pPr>
+            <a:r>
+              <a:t>Cotations SPX → smile commune → RND</a:t>
+            </a:r>
+          </a:p>
+        </p:txBody>
+      </p:sp>
+      <p:sp>
+        <p:nvSpPr>
+          <p:cNvPr id="9" name="TextBox 8"/>
+          <p:cNvSpPr txBox="1"/>
+          <p:nvPr/>
+        </p:nvSpPr>
+        <p:spPr>
+          <a:xfrm>
+            <a:off x="685800" y="3520440"/>
+            <a:ext cx="3383280" cy="1371600"/>
+          </a:xfrm>
+          <a:prstGeom prst="rect">
+            <a:avLst/>
+          </a:prstGeom>
+          <a:noFill/>
+        </p:spPr>
+        <p:txBody>
+          <a:bodyPr wrap="square" lIns="0" rIns="0">
+            <a:spAutoFit/>
+          </a:bodyPr>
           <a:lstStyle/>
           <a:p>
             <a:pPr algn="ctr">
-              <a:defRPr b="1" sz="1100">
-                <a:solidFill>
-                  <a:srgbClr val="153A5B"/>
-                </a:solidFill>
-                <a:latin typeface="Arial"/>
-              </a:defRPr>
-            </a:pPr>
-            <a:r>
-              <a:t>Prévision</a:t>
-            </a:r>
-          </a:p>
-        </p:txBody>
-      </p:sp>
-      <p:sp>
-        <p:nvSpPr>
-          <p:cNvPr id="14" name="Right Arrow 13"/>
-          <p:cNvSpPr/>
-          <p:nvPr/>
-        </p:nvSpPr>
-        <p:spPr>
-          <a:xfrm>
-            <a:off x="10460736" y="2331720"/>
-            <a:ext cx="201168" cy="320040"/>
-          </a:xfrm>
-          <a:prstGeom prst="rightArrow">
-            <a:avLst/>
-          </a:prstGeom>
-          <a:solidFill>
-            <a:srgbClr val="E07A3F"/>
-          </a:solidFill>
-          <a:ln>
-            <a:noFill/>
-          </a:ln>
-        </p:spPr>
-        <p:style>
-          <a:lnRef idx="1">
-            <a:schemeClr val="accent1"/>
-          </a:lnRef>
-          <a:fillRef idx="3">
-            <a:schemeClr val="accent1"/>
-          </a:fillRef>
-          <a:effectRef idx="2">
-            <a:schemeClr val="accent1"/>
-          </a:effectRef>
-          <a:fontRef idx="minor">
-            <a:schemeClr val="lt1"/>
-          </a:fontRef>
-        </p:style>
-        <p:txBody>
-          <a:bodyPr rtlCol="0" anchor="ctr"/>
-          <a:lstStyle/>
-          <a:p>
-            <a:pPr algn="ctr"/>
-          </a:p>
-        </p:txBody>
-      </p:sp>
-      <p:sp>
-        <p:nvSpPr>
-          <p:cNvPr id="15" name="Rounded Rectangle 14"/>
-          <p:cNvSpPr/>
-          <p:nvPr/>
-        </p:nvSpPr>
-        <p:spPr>
-          <a:xfrm>
-            <a:off x="10625328" y="2057400"/>
-            <a:ext cx="960120" cy="914400"/>
-          </a:xfrm>
-          <a:prstGeom prst="roundRect">
-            <a:avLst/>
-          </a:prstGeom>
-          <a:solidFill>
-            <a:srgbClr val="EAF2F6"/>
-          </a:solidFill>
-          <a:ln>
-            <a:solidFill>
-              <a:srgbClr val="168AAD"/>
-            </a:solidFill>
-          </a:ln>
-        </p:spPr>
-        <p:style>
-          <a:lnRef idx="1">
-            <a:schemeClr val="accent1"/>
-          </a:lnRef>
-          <a:fillRef idx="3">
-            <a:schemeClr val="accent1"/>
-          </a:fillRef>
-          <a:effectRef idx="2">
-            <a:schemeClr val="accent1"/>
-          </a:effectRef>
-          <a:fontRef idx="minor">
-            <a:schemeClr val="lt1"/>
-          </a:fontRef>
-        </p:style>
-        <p:txBody>
-          <a:bodyPr rtlCol="0" anchor="ctr"/>
+              <a:defRPr sz="1500" b="0">
+                <a:solidFill>
+                  <a:srgbClr val="27313A"/>
+                </a:solidFill>
+                <a:latin typeface="Arial"/>
+              </a:defRPr>
+            </a:pPr>
+            <a:r>
+              <a:t>Breeden–Litzenberger</a:t>
+            </a:r>
+            <a:br/>
+            <a:r>
+              <a:t>COS</a:t>
+            </a:r>
+            <a:br/>
+            <a:r>
+              <a:t>Repondération entropique</a:t>
+            </a:r>
+          </a:p>
+        </p:txBody>
+      </p:sp>
+      <p:sp>
+        <p:nvSpPr>
+          <p:cNvPr id="10" name="TextBox 9"/>
+          <p:cNvSpPr txBox="1"/>
+          <p:nvPr/>
+        </p:nvSpPr>
+        <p:spPr>
+          <a:xfrm>
+            <a:off x="4507992" y="2331720"/>
+            <a:ext cx="3383280" cy="347472"/>
+          </a:xfrm>
+          <a:prstGeom prst="rect">
+            <a:avLst/>
+          </a:prstGeom>
+          <a:noFill/>
+        </p:spPr>
+        <p:txBody>
+          <a:bodyPr wrap="square" lIns="0" rIns="0">
+            <a:spAutoFit/>
+          </a:bodyPr>
           <a:lstStyle/>
           <a:p>
             <a:pPr algn="ctr">
-              <a:defRPr b="1" sz="1100">
-                <a:solidFill>
-                  <a:srgbClr val="153A5B"/>
-                </a:solidFill>
-                <a:latin typeface="Arial"/>
-              </a:defRPr>
-            </a:pPr>
-            <a:r>
-              <a:t>Couverture</a:t>
+              <a:defRPr sz="1900" b="1">
+                <a:solidFill>
+                  <a:srgbClr val="111111"/>
+                </a:solidFill>
+                <a:latin typeface="Arial"/>
+              </a:defRPr>
+            </a:pPr>
+            <a:r>
+              <a:t>Dynamique</a:t>
+            </a:r>
+          </a:p>
+        </p:txBody>
+      </p:sp>
+      <p:sp>
+        <p:nvSpPr>
+          <p:cNvPr id="11" name="TextBox 10"/>
+          <p:cNvSpPr txBox="1"/>
+          <p:nvPr/>
+        </p:nvSpPr>
+        <p:spPr>
+          <a:xfrm>
+            <a:off x="4507992" y="2788920"/>
+            <a:ext cx="3383280" cy="548640"/>
+          </a:xfrm>
+          <a:prstGeom prst="rect">
+            <a:avLst/>
+          </a:prstGeom>
+          <a:noFill/>
+        </p:spPr>
+        <p:txBody>
+          <a:bodyPr wrap="square" lIns="0" rIns="0">
+            <a:spAutoFit/>
+          </a:bodyPr>
+          <a:lstStyle/>
+          <a:p>
+            <a:pPr algn="ctr">
+              <a:defRPr sz="1400" b="1">
+                <a:solidFill>
+                  <a:srgbClr val="315B78"/>
+                </a:solidFill>
+                <a:latin typeface="Arial"/>
+              </a:defRPr>
+            </a:pPr>
+            <a:r>
+              <a:t>RND quotidiennes à maturité constante</a:t>
+            </a:r>
+          </a:p>
+        </p:txBody>
+      </p:sp>
+      <p:sp>
+        <p:nvSpPr>
+          <p:cNvPr id="12" name="TextBox 11"/>
+          <p:cNvSpPr txBox="1"/>
+          <p:nvPr/>
+        </p:nvSpPr>
+        <p:spPr>
+          <a:xfrm>
+            <a:off x="4507992" y="3520440"/>
+            <a:ext cx="3383280" cy="1371600"/>
+          </a:xfrm>
+          <a:prstGeom prst="rect">
+            <a:avLst/>
+          </a:prstGeom>
+          <a:noFill/>
+        </p:spPr>
+        <p:txBody>
+          <a:bodyPr wrap="square" lIns="0" rIns="0">
+            <a:spAutoFit/>
+          </a:bodyPr>
+          <a:lstStyle/>
+          <a:p>
+            <a:pPr algn="ctr">
+              <a:defRPr sz="1500" b="0">
+                <a:solidFill>
+                  <a:srgbClr val="27313A"/>
+                </a:solidFill>
+                <a:latin typeface="Arial"/>
+              </a:defRPr>
+            </a:pPr>
+            <a:r>
+              <a:t>Distances entre densités</a:t>
+            </a:r>
+            <a:br/>
+            <a:r>
+              <a:t>Facteurs fonctionnels</a:t>
+            </a:r>
+            <a:br/>
+            <a:r>
+              <a:t>Prévision AR/VAR</a:t>
+            </a:r>
+          </a:p>
+        </p:txBody>
+      </p:sp>
+      <p:sp>
+        <p:nvSpPr>
+          <p:cNvPr id="13" name="TextBox 12"/>
+          <p:cNvSpPr txBox="1"/>
+          <p:nvPr/>
+        </p:nvSpPr>
+        <p:spPr>
+          <a:xfrm>
+            <a:off x="8330183" y="2331720"/>
+            <a:ext cx="3383280" cy="347472"/>
+          </a:xfrm>
+          <a:prstGeom prst="rect">
+            <a:avLst/>
+          </a:prstGeom>
+          <a:noFill/>
+        </p:spPr>
+        <p:txBody>
+          <a:bodyPr wrap="square" lIns="0" rIns="0">
+            <a:spAutoFit/>
+          </a:bodyPr>
+          <a:lstStyle/>
+          <a:p>
+            <a:pPr algn="ctr">
+              <a:defRPr sz="1900" b="1">
+                <a:solidFill>
+                  <a:srgbClr val="111111"/>
+                </a:solidFill>
+                <a:latin typeface="Arial"/>
+              </a:defRPr>
+            </a:pPr>
+            <a:r>
+              <a:t>Évaluation</a:t>
+            </a:r>
+          </a:p>
+        </p:txBody>
+      </p:sp>
+      <p:sp>
+        <p:nvSpPr>
+          <p:cNvPr id="14" name="TextBox 13"/>
+          <p:cNvSpPr txBox="1"/>
+          <p:nvPr/>
+        </p:nvSpPr>
+        <p:spPr>
+          <a:xfrm>
+            <a:off x="8330183" y="2788920"/>
+            <a:ext cx="3383280" cy="548640"/>
+          </a:xfrm>
+          <a:prstGeom prst="rect">
+            <a:avLst/>
+          </a:prstGeom>
+          <a:noFill/>
+        </p:spPr>
+        <p:txBody>
+          <a:bodyPr wrap="square" lIns="0" rIns="0">
+            <a:spAutoFit/>
+          </a:bodyPr>
+          <a:lstStyle/>
+          <a:p>
+            <a:pPr algn="ctr">
+              <a:defRPr sz="1400" b="1">
+                <a:solidFill>
+                  <a:srgbClr val="315B78"/>
+                </a:solidFill>
+                <a:latin typeface="Arial"/>
+              </a:defRPr>
+            </a:pPr>
+            <a:r>
+              <a:t>Prévisions hors échantillon</a:t>
+            </a:r>
+          </a:p>
+        </p:txBody>
+      </p:sp>
+      <p:sp>
+        <p:nvSpPr>
+          <p:cNvPr id="15" name="TextBox 14"/>
+          <p:cNvSpPr txBox="1"/>
+          <p:nvPr/>
+        </p:nvSpPr>
+        <p:spPr>
+          <a:xfrm>
+            <a:off x="8330183" y="3520440"/>
+            <a:ext cx="3383280" cy="1371600"/>
+          </a:xfrm>
+          <a:prstGeom prst="rect">
+            <a:avLst/>
+          </a:prstGeom>
+          <a:noFill/>
+        </p:spPr>
+        <p:txBody>
+          <a:bodyPr wrap="square" lIns="0" rIns="0">
+            <a:spAutoFit/>
+          </a:bodyPr>
+          <a:lstStyle/>
+          <a:p>
+            <a:pPr algn="ctr">
+              <a:defRPr sz="1500" b="0">
+                <a:solidFill>
+                  <a:srgbClr val="27313A"/>
+                </a:solidFill>
+                <a:latin typeface="Arial"/>
+              </a:defRPr>
+            </a:pPr>
+            <a:r>
+              <a:t>Erreur de pricing</a:t>
+            </a:r>
+            <a:br/>
+            <a:r>
+              <a:t>Erreur de couverture</a:t>
+            </a:r>
+            <a:br/>
+            <a:r>
+              <a:t>Coûts de transaction</a:t>
+            </a:r>
+          </a:p>
+        </p:txBody>
+      </p:sp>
+      <p:sp>
+        <p:nvSpPr>
+          <p:cNvPr id="16" name="TextBox 15"/>
+          <p:cNvSpPr txBox="1"/>
+          <p:nvPr/>
+        </p:nvSpPr>
+        <p:spPr>
+          <a:xfrm>
+            <a:off x="914400" y="5669280"/>
+            <a:ext cx="10332720" cy="384048"/>
+          </a:xfrm>
+          <a:prstGeom prst="rect">
+            <a:avLst/>
+          </a:prstGeom>
+          <a:noFill/>
+        </p:spPr>
+        <p:txBody>
+          <a:bodyPr wrap="square" lIns="0" rIns="0">
+            <a:spAutoFit/>
+          </a:bodyPr>
+          <a:lstStyle/>
+          <a:p>
+            <a:pPr algn="ctr">
+              <a:defRPr sz="1600" b="1">
+                <a:solidFill>
+                  <a:srgbClr val="111111"/>
+                </a:solidFill>
+                <a:latin typeface="Arial"/>
+              </a:defRPr>
+            </a:pPr>
+            <a:r>
+              <a:t>Jalon actuel : pipeline reproductible sur une date et diagnostic de la structure par terme.</a:t>
             </a:r>
           </a:p>
         </p:txBody>
@@ -4469,14 +4938,14 @@
         </p:nvSpPr>
         <p:spPr>
           <a:xfrm>
-            <a:off x="0" y="0"/>
-            <a:ext cx="12191695" cy="164592"/>
+            <a:off x="530352" y="868680"/>
+            <a:ext cx="11109960" cy="16459"/>
           </a:xfrm>
           <a:prstGeom prst="rect">
             <a:avLst/>
           </a:prstGeom>
           <a:solidFill>
-            <a:srgbClr val="153A5B"/>
+            <a:srgbClr val="111111"/>
           </a:solidFill>
           <a:ln>
             <a:noFill/>
@@ -4512,8 +4981,8 @@
         </p:nvSpPr>
         <p:spPr>
           <a:xfrm>
-            <a:off x="594360" y="347472"/>
-            <a:ext cx="10881360" cy="566928"/>
+            <a:off x="566928" y="274320"/>
+            <a:ext cx="10881360" cy="502920"/>
           </a:xfrm>
           <a:prstGeom prst="rect">
             <a:avLst/>
@@ -4529,13 +4998,13 @@
             <a:pPr>
               <a:defRPr b="1" sz="2500">
                 <a:solidFill>
-                  <a:srgbClr val="153A5B"/>
-                </a:solidFill>
-                <a:latin typeface="Arial"/>
-              </a:defRPr>
-            </a:pPr>
-            <a:r>
-              <a:t>2. Données et accès</a:t>
+                  <a:srgbClr val="111111"/>
+                </a:solidFill>
+                <a:latin typeface="Arial"/>
+              </a:defRPr>
+            </a:pPr>
+            <a:r>
+              <a:t>2. Données Cboe et règles de filtrage</a:t>
             </a:r>
           </a:p>
         </p:txBody>
@@ -4548,8 +5017,8 @@
         </p:nvSpPr>
         <p:spPr>
           <a:xfrm>
-            <a:off x="594360" y="6510528"/>
-            <a:ext cx="10972800" cy="182880"/>
+            <a:off x="566928" y="6510528"/>
+            <a:ext cx="10972800" cy="164592"/>
           </a:xfrm>
           <a:prstGeom prst="rect">
             <a:avLst/>
@@ -4565,292 +5034,20 @@
             <a:pPr>
               <a:defRPr sz="800">
                 <a:solidFill>
-                  <a:srgbClr val="60717D"/>
-                </a:solidFill>
-                <a:latin typeface="Arial"/>
-              </a:defRPr>
-            </a:pPr>
-            <a:r>
-              <a:t>Projet PI² n°176 — Suivi n°1     3/10</a:t>
-            </a:r>
-          </a:p>
-        </p:txBody>
-      </p:sp>
-      <p:sp>
-        <p:nvSpPr>
-          <p:cNvPr id="6" name="Rounded Rectangle 5"/>
-          <p:cNvSpPr/>
-          <p:nvPr/>
-        </p:nvSpPr>
-        <p:spPr>
-          <a:xfrm>
-            <a:off x="731520" y="1234440"/>
-            <a:ext cx="2468880" cy="1051560"/>
-          </a:xfrm>
-          <a:prstGeom prst="roundRect">
-            <a:avLst/>
-          </a:prstGeom>
-          <a:solidFill>
-            <a:srgbClr val="EAF2F6"/>
-          </a:solidFill>
-          <a:ln>
-            <a:solidFill>
-              <a:srgbClr val="168AAD"/>
-            </a:solidFill>
-          </a:ln>
-        </p:spPr>
-        <p:style>
-          <a:lnRef idx="1">
-            <a:schemeClr val="accent1"/>
-          </a:lnRef>
-          <a:fillRef idx="3">
-            <a:schemeClr val="accent1"/>
-          </a:fillRef>
-          <a:effectRef idx="2">
-            <a:schemeClr val="accent1"/>
-          </a:effectRef>
-          <a:fontRef idx="minor">
-            <a:schemeClr val="lt1"/>
-          </a:fontRef>
-        </p:style>
-        <p:txBody>
-          <a:bodyPr rtlCol="0" anchor="ctr"/>
-          <a:lstStyle/>
-          <a:p>
-            <a:pPr algn="ctr">
-              <a:defRPr b="1" sz="2400">
-                <a:solidFill>
-                  <a:srgbClr val="153A5B"/>
-                </a:solidFill>
-                <a:latin typeface="Arial"/>
-              </a:defRPr>
-            </a:pPr>
-            <a:r>
-              <a:t>1,446</a:t>
-            </a:r>
-          </a:p>
-          <a:p>
-            <a:pPr algn="ctr">
-              <a:defRPr sz="1000">
-                <a:solidFill>
-                  <a:srgbClr val="60717D"/>
-                </a:solidFill>
-                <a:latin typeface="Arial"/>
-              </a:defRPr>
-            </a:pPr>
-            <a:r>
-              <a:t>contrats SPX</a:t>
-            </a:r>
-          </a:p>
-        </p:txBody>
-      </p:sp>
-      <p:sp>
-        <p:nvSpPr>
-          <p:cNvPr id="7" name="Rounded Rectangle 6"/>
-          <p:cNvSpPr/>
-          <p:nvPr/>
-        </p:nvSpPr>
-        <p:spPr>
-          <a:xfrm>
-            <a:off x="3474720" y="1234440"/>
-            <a:ext cx="2468880" cy="1051560"/>
-          </a:xfrm>
-          <a:prstGeom prst="roundRect">
-            <a:avLst/>
-          </a:prstGeom>
-          <a:solidFill>
-            <a:srgbClr val="EAF2F6"/>
-          </a:solidFill>
-          <a:ln>
-            <a:solidFill>
-              <a:srgbClr val="168AAD"/>
-            </a:solidFill>
-          </a:ln>
-        </p:spPr>
-        <p:style>
-          <a:lnRef idx="1">
-            <a:schemeClr val="accent1"/>
-          </a:lnRef>
-          <a:fillRef idx="3">
-            <a:schemeClr val="accent1"/>
-          </a:fillRef>
-          <a:effectRef idx="2">
-            <a:schemeClr val="accent1"/>
-          </a:effectRef>
-          <a:fontRef idx="minor">
-            <a:schemeClr val="lt1"/>
-          </a:fontRef>
-        </p:style>
-        <p:txBody>
-          <a:bodyPr rtlCol="0" anchor="ctr"/>
-          <a:lstStyle/>
-          <a:p>
-            <a:pPr algn="ctr">
-              <a:defRPr b="1" sz="2400">
-                <a:solidFill>
-                  <a:srgbClr val="153A5B"/>
-                </a:solidFill>
-                <a:latin typeface="Arial"/>
-              </a:defRPr>
-            </a:pPr>
-            <a:r>
-              <a:t>1,277</a:t>
-            </a:r>
-          </a:p>
-          <a:p>
-            <a:pPr algn="ctr">
-              <a:defRPr sz="1000">
-                <a:solidFill>
-                  <a:srgbClr val="60717D"/>
-                </a:solidFill>
-                <a:latin typeface="Arial"/>
-              </a:defRPr>
-            </a:pPr>
-            <a:r>
-              <a:t>cotations valides</a:t>
-            </a:r>
-          </a:p>
-        </p:txBody>
-      </p:sp>
-      <p:sp>
-        <p:nvSpPr>
-          <p:cNvPr id="8" name="Rounded Rectangle 7"/>
-          <p:cNvSpPr/>
-          <p:nvPr/>
-        </p:nvSpPr>
-        <p:spPr>
-          <a:xfrm>
-            <a:off x="6217920" y="1234440"/>
-            <a:ext cx="2468880" cy="1051560"/>
-          </a:xfrm>
-          <a:prstGeom prst="roundRect">
-            <a:avLst/>
-          </a:prstGeom>
-          <a:solidFill>
-            <a:srgbClr val="EAF2F6"/>
-          </a:solidFill>
-          <a:ln>
-            <a:solidFill>
-              <a:srgbClr val="168AAD"/>
-            </a:solidFill>
-          </a:ln>
-        </p:spPr>
-        <p:style>
-          <a:lnRef idx="1">
-            <a:schemeClr val="accent1"/>
-          </a:lnRef>
-          <a:fillRef idx="3">
-            <a:schemeClr val="accent1"/>
-          </a:fillRef>
-          <a:effectRef idx="2">
-            <a:schemeClr val="accent1"/>
-          </a:effectRef>
-          <a:fontRef idx="minor">
-            <a:schemeClr val="lt1"/>
-          </a:fontRef>
-        </p:style>
-        <p:txBody>
-          <a:bodyPr rtlCol="0" anchor="ctr"/>
-          <a:lstStyle/>
-          <a:p>
-            <a:pPr algn="ctr">
-              <a:defRPr b="1" sz="2400">
-                <a:solidFill>
-                  <a:srgbClr val="153A5B"/>
-                </a:solidFill>
-                <a:latin typeface="Arial"/>
-              </a:defRPr>
-            </a:pPr>
-            <a:r>
-              <a:t>338</a:t>
-            </a:r>
-          </a:p>
-          <a:p>
-            <a:pPr algn="ctr">
-              <a:defRPr sz="1000">
-                <a:solidFill>
-                  <a:srgbClr val="60717D"/>
-                </a:solidFill>
-                <a:latin typeface="Arial"/>
-              </a:defRPr>
-            </a:pPr>
-            <a:r>
-              <a:t>points de calibration</a:t>
-            </a:r>
-          </a:p>
-        </p:txBody>
-      </p:sp>
-      <p:sp>
-        <p:nvSpPr>
-          <p:cNvPr id="9" name="Rounded Rectangle 8"/>
-          <p:cNvSpPr/>
-          <p:nvPr/>
-        </p:nvSpPr>
-        <p:spPr>
-          <a:xfrm>
-            <a:off x="8961120" y="1234440"/>
-            <a:ext cx="2468880" cy="1051560"/>
-          </a:xfrm>
-          <a:prstGeom prst="roundRect">
-            <a:avLst/>
-          </a:prstGeom>
-          <a:solidFill>
-            <a:srgbClr val="EAF2F6"/>
-          </a:solidFill>
-          <a:ln>
-            <a:solidFill>
-              <a:srgbClr val="168AAD"/>
-            </a:solidFill>
-          </a:ln>
-        </p:spPr>
-        <p:style>
-          <a:lnRef idx="1">
-            <a:schemeClr val="accent1"/>
-          </a:lnRef>
-          <a:fillRef idx="3">
-            <a:schemeClr val="accent1"/>
-          </a:fillRef>
-          <a:effectRef idx="2">
-            <a:schemeClr val="accent1"/>
-          </a:effectRef>
-          <a:fontRef idx="minor">
-            <a:schemeClr val="lt1"/>
-          </a:fontRef>
-        </p:style>
-        <p:txBody>
-          <a:bodyPr rtlCol="0" anchor="ctr"/>
-          <a:lstStyle/>
-          <a:p>
-            <a:pPr algn="ctr">
-              <a:defRPr b="1" sz="2400">
-                <a:solidFill>
-                  <a:srgbClr val="153A5B"/>
-                </a:solidFill>
-                <a:latin typeface="Arial"/>
-              </a:defRPr>
-            </a:pPr>
-            <a:r>
-              <a:t>91 jours</a:t>
-            </a:r>
-          </a:p>
-          <a:p>
-            <a:pPr algn="ctr">
-              <a:defRPr sz="1000">
-                <a:solidFill>
-                  <a:srgbClr val="60717D"/>
-                </a:solidFill>
-                <a:latin typeface="Arial"/>
-              </a:defRPr>
-            </a:pPr>
-            <a:r>
-              <a:t>échéance 15/01/2027</a:t>
+                  <a:srgbClr val="59636C"/>
+                </a:solidFill>
+                <a:latin typeface="Arial"/>
+              </a:defRPr>
+            </a:pPr>
+            <a:r>
+              <a:t>Projet PI² n°176  ·  Suivi n°1  ·  23 octobre 2026                                      3/11</a:t>
             </a:r>
           </a:p>
         </p:txBody>
       </p:sp>
       <p:pic>
         <p:nvPicPr>
-          <p:cNvPr id="10" name="Picture 9" descr="01_data_quality.png"/>
+          <p:cNvPr id="6" name="Picture 5" descr="01_data_quality.png"/>
           <p:cNvPicPr>
             <a:picLocks noChangeAspect="1"/>
           </p:cNvPicPr>
@@ -4864,14 +5061,158 @@
         </p:blipFill>
         <p:spPr>
           <a:xfrm>
-            <a:off x="777240" y="2606040"/>
-            <a:ext cx="6583680" cy="3291840"/>
+            <a:off x="502920" y="2149388"/>
+            <a:ext cx="7086600" cy="2696382"/>
           </a:xfrm>
           <a:prstGeom prst="rect">
             <a:avLst/>
           </a:prstGeom>
         </p:spPr>
       </p:pic>
+      <p:sp>
+        <p:nvSpPr>
+          <p:cNvPr id="7" name="TextBox 6"/>
+          <p:cNvSpPr txBox="1"/>
+          <p:nvPr/>
+        </p:nvSpPr>
+        <p:spPr>
+          <a:xfrm>
+            <a:off x="7882127" y="1170432"/>
+            <a:ext cx="1143000" cy="347472"/>
+          </a:xfrm>
+          <a:prstGeom prst="rect">
+            <a:avLst/>
+          </a:prstGeom>
+          <a:noFill/>
+        </p:spPr>
+        <p:txBody>
+          <a:bodyPr wrap="square" lIns="0" rIns="0">
+            <a:spAutoFit/>
+          </a:bodyPr>
+          <a:lstStyle/>
+          <a:p>
+            <a:pPr algn="l">
+              <a:defRPr sz="2000" b="1">
+                <a:solidFill>
+                  <a:srgbClr val="111111"/>
+                </a:solidFill>
+                <a:latin typeface="Arial"/>
+              </a:defRPr>
+            </a:pPr>
+            <a:r>
+              <a:t>1 446</a:t>
+            </a:r>
+          </a:p>
+        </p:txBody>
+      </p:sp>
+      <p:sp>
+        <p:nvSpPr>
+          <p:cNvPr id="8" name="TextBox 7"/>
+          <p:cNvSpPr txBox="1"/>
+          <p:nvPr/>
+        </p:nvSpPr>
+        <p:spPr>
+          <a:xfrm>
+            <a:off x="9070848" y="1197864"/>
+            <a:ext cx="2103120" cy="347472"/>
+          </a:xfrm>
+          <a:prstGeom prst="rect">
+            <a:avLst/>
+          </a:prstGeom>
+          <a:noFill/>
+        </p:spPr>
+        <p:txBody>
+          <a:bodyPr wrap="square" lIns="0" rIns="0">
+            <a:spAutoFit/>
+          </a:bodyPr>
+          <a:lstStyle/>
+          <a:p>
+            <a:pPr algn="l">
+              <a:defRPr sz="1200" b="0">
+                <a:solidFill>
+                  <a:srgbClr val="59636C"/>
+                </a:solidFill>
+                <a:latin typeface="Arial"/>
+              </a:defRPr>
+            </a:pPr>
+            <a:r>
+              <a:t>contrats SPX</a:t>
+            </a:r>
+          </a:p>
+        </p:txBody>
+      </p:sp>
+      <p:sp>
+        <p:nvSpPr>
+          <p:cNvPr id="9" name="TextBox 8"/>
+          <p:cNvSpPr txBox="1"/>
+          <p:nvPr/>
+        </p:nvSpPr>
+        <p:spPr>
+          <a:xfrm>
+            <a:off x="7882127" y="1673352"/>
+            <a:ext cx="1143000" cy="347472"/>
+          </a:xfrm>
+          <a:prstGeom prst="rect">
+            <a:avLst/>
+          </a:prstGeom>
+          <a:noFill/>
+        </p:spPr>
+        <p:txBody>
+          <a:bodyPr wrap="square" lIns="0" rIns="0">
+            <a:spAutoFit/>
+          </a:bodyPr>
+          <a:lstStyle/>
+          <a:p>
+            <a:pPr algn="l">
+              <a:defRPr sz="2000" b="1">
+                <a:solidFill>
+                  <a:srgbClr val="111111"/>
+                </a:solidFill>
+                <a:latin typeface="Arial"/>
+              </a:defRPr>
+            </a:pPr>
+            <a:r>
+              <a:t>1 277</a:t>
+            </a:r>
+          </a:p>
+        </p:txBody>
+      </p:sp>
+      <p:sp>
+        <p:nvSpPr>
+          <p:cNvPr id="10" name="TextBox 9"/>
+          <p:cNvSpPr txBox="1"/>
+          <p:nvPr/>
+        </p:nvSpPr>
+        <p:spPr>
+          <a:xfrm>
+            <a:off x="9070848" y="1700784"/>
+            <a:ext cx="2103120" cy="347472"/>
+          </a:xfrm>
+          <a:prstGeom prst="rect">
+            <a:avLst/>
+          </a:prstGeom>
+          <a:noFill/>
+        </p:spPr>
+        <p:txBody>
+          <a:bodyPr wrap="square" lIns="0" rIns="0">
+            <a:spAutoFit/>
+          </a:bodyPr>
+          <a:lstStyle/>
+          <a:p>
+            <a:pPr algn="l">
+              <a:defRPr sz="1200" b="0">
+                <a:solidFill>
+                  <a:srgbClr val="59636C"/>
+                </a:solidFill>
+                <a:latin typeface="Arial"/>
+              </a:defRPr>
+            </a:pPr>
+            <a:r>
+              <a:t>cotations valides</a:t>
+            </a:r>
+          </a:p>
+        </p:txBody>
+      </p:sp>
       <p:sp>
         <p:nvSpPr>
           <p:cNvPr id="11" name="TextBox 10"/>
@@ -4880,8 +5221,8 @@
         </p:nvSpPr>
         <p:spPr>
           <a:xfrm>
-            <a:off x="7635240" y="2743200"/>
-            <a:ext cx="3794760" cy="3017520"/>
+            <a:off x="7882127" y="2176272"/>
+            <a:ext cx="1143000" cy="347472"/>
           </a:xfrm>
           <a:prstGeom prst="rect">
             <a:avLst/>
@@ -4889,7 +5230,151 @@
           <a:noFill/>
         </p:spPr>
         <p:txBody>
-          <a:bodyPr wrap="square" lIns="45720" rIns="27432">
+          <a:bodyPr wrap="square" lIns="0" rIns="0">
+            <a:spAutoFit/>
+          </a:bodyPr>
+          <a:lstStyle/>
+          <a:p>
+            <a:pPr algn="l">
+              <a:defRPr sz="2000" b="1">
+                <a:solidFill>
+                  <a:srgbClr val="111111"/>
+                </a:solidFill>
+                <a:latin typeface="Arial"/>
+              </a:defRPr>
+            </a:pPr>
+            <a:r>
+              <a:t>338</a:t>
+            </a:r>
+          </a:p>
+        </p:txBody>
+      </p:sp>
+      <p:sp>
+        <p:nvSpPr>
+          <p:cNvPr id="12" name="TextBox 11"/>
+          <p:cNvSpPr txBox="1"/>
+          <p:nvPr/>
+        </p:nvSpPr>
+        <p:spPr>
+          <a:xfrm>
+            <a:off x="9070848" y="2203703"/>
+            <a:ext cx="2103120" cy="347472"/>
+          </a:xfrm>
+          <a:prstGeom prst="rect">
+            <a:avLst/>
+          </a:prstGeom>
+          <a:noFill/>
+        </p:spPr>
+        <p:txBody>
+          <a:bodyPr wrap="square" lIns="0" rIns="0">
+            <a:spAutoFit/>
+          </a:bodyPr>
+          <a:lstStyle/>
+          <a:p>
+            <a:pPr algn="l">
+              <a:defRPr sz="1200" b="0">
+                <a:solidFill>
+                  <a:srgbClr val="59636C"/>
+                </a:solidFill>
+                <a:latin typeface="Arial"/>
+              </a:defRPr>
+            </a:pPr>
+            <a:r>
+              <a:t>points de calibration</a:t>
+            </a:r>
+          </a:p>
+        </p:txBody>
+      </p:sp>
+      <p:sp>
+        <p:nvSpPr>
+          <p:cNvPr id="13" name="TextBox 12"/>
+          <p:cNvSpPr txBox="1"/>
+          <p:nvPr/>
+        </p:nvSpPr>
+        <p:spPr>
+          <a:xfrm>
+            <a:off x="7882127" y="2679192"/>
+            <a:ext cx="1143000" cy="347472"/>
+          </a:xfrm>
+          <a:prstGeom prst="rect">
+            <a:avLst/>
+          </a:prstGeom>
+          <a:noFill/>
+        </p:spPr>
+        <p:txBody>
+          <a:bodyPr wrap="square" lIns="0" rIns="0">
+            <a:spAutoFit/>
+          </a:bodyPr>
+          <a:lstStyle/>
+          <a:p>
+            <a:pPr algn="l">
+              <a:defRPr sz="2000" b="1">
+                <a:solidFill>
+                  <a:srgbClr val="111111"/>
+                </a:solidFill>
+                <a:latin typeface="Arial"/>
+              </a:defRPr>
+            </a:pPr>
+            <a:r>
+              <a:t>91 j</a:t>
+            </a:r>
+          </a:p>
+        </p:txBody>
+      </p:sp>
+      <p:sp>
+        <p:nvSpPr>
+          <p:cNvPr id="14" name="TextBox 13"/>
+          <p:cNvSpPr txBox="1"/>
+          <p:nvPr/>
+        </p:nvSpPr>
+        <p:spPr>
+          <a:xfrm>
+            <a:off x="9070848" y="2706624"/>
+            <a:ext cx="2103120" cy="347472"/>
+          </a:xfrm>
+          <a:prstGeom prst="rect">
+            <a:avLst/>
+          </a:prstGeom>
+          <a:noFill/>
+        </p:spPr>
+        <p:txBody>
+          <a:bodyPr wrap="square" lIns="0" rIns="0">
+            <a:spAutoFit/>
+          </a:bodyPr>
+          <a:lstStyle/>
+          <a:p>
+            <a:pPr algn="l">
+              <a:defRPr sz="1200" b="0">
+                <a:solidFill>
+                  <a:srgbClr val="59636C"/>
+                </a:solidFill>
+                <a:latin typeface="Arial"/>
+              </a:defRPr>
+            </a:pPr>
+            <a:r>
+              <a:t>échéance du 15/01/2027</a:t>
+            </a:r>
+          </a:p>
+        </p:txBody>
+      </p:sp>
+      <p:sp>
+        <p:nvSpPr>
+          <p:cNvPr id="15" name="TextBox 14"/>
+          <p:cNvSpPr txBox="1"/>
+          <p:nvPr/>
+        </p:nvSpPr>
+        <p:spPr>
+          <a:xfrm>
+            <a:off x="7818120" y="3337560"/>
+            <a:ext cx="3840480" cy="2240280"/>
+          </a:xfrm>
+          <a:prstGeom prst="rect">
+            <a:avLst/>
+          </a:prstGeom>
+          <a:noFill/>
+        </p:spPr>
+        <p:txBody>
+          <a:bodyPr wrap="square" lIns="18288" rIns="0">
             <a:spAutoFit/>
           </a:bodyPr>
           <a:lstStyle/>
@@ -4898,15 +5383,15 @@
               <a:spcAft>
                 <a:spcPts val="1000"/>
               </a:spcAft>
-              <a:defRPr sz="1500">
-                <a:solidFill>
-                  <a:srgbClr val="24323D"/>
-                </a:solidFill>
-                <a:latin typeface="Arial"/>
-              </a:defRPr>
-            </a:pPr>
-            <a:r>
-              <a:t>• Cboe public différé : accès confirmé.</a:t>
+              <a:defRPr sz="1400">
+                <a:solidFill>
+                  <a:srgbClr val="27313A"/>
+                </a:solidFill>
+                <a:latin typeface="Arial"/>
+              </a:defRPr>
+            </a:pPr>
+            <a:r>
+              <a:t>• Mid bid–ask plutôt que dernier prix parfois ancien.</a:t>
             </a:r>
           </a:p>
           <a:p>
@@ -4914,15 +5399,15 @@
               <a:spcAft>
                 <a:spcPts val="1000"/>
               </a:spcAft>
-              <a:defRPr sz="1500">
-                <a:solidFill>
-                  <a:srgbClr val="24323D"/>
-                </a:solidFill>
-                <a:latin typeface="Arial"/>
-              </a:defRPr>
-            </a:pPr>
-            <a:r>
-              <a:t>• Bloomberg : terminal/API absent ici.</a:t>
+              <a:defRPr sz="1400">
+                <a:solidFill>
+                  <a:srgbClr val="27313A"/>
+                </a:solidFill>
+                <a:latin typeface="Arial"/>
+              </a:defRPr>
+            </a:pPr>
+            <a:r>
+              <a:t>• Exclusion : bid nul, marché croisé, mid &lt; 0,05 et spread relatif &gt; 35 %.</a:t>
             </a:r>
           </a:p>
           <a:p>
@@ -4930,31 +5415,51 @@
               <a:spcAft>
                 <a:spcPts val="1000"/>
               </a:spcAft>
-              <a:defRPr sz="1500">
-                <a:solidFill>
-                  <a:srgbClr val="24323D"/>
-                </a:solidFill>
-                <a:latin typeface="Arial"/>
-              </a:defRPr>
-            </a:pPr>
-            <a:r>
-              <a:t>• Historique : export école, OptionMetrics ou DataShop requis.</a:t>
-            </a:r>
-          </a:p>
-          <a:p>
-            <a:pPr>
-              <a:spcAft>
-                <a:spcPts val="1000"/>
-              </a:spcAft>
-              <a:defRPr sz="1500">
-                <a:solidFill>
-                  <a:srgbClr val="24323D"/>
-                </a:solidFill>
-                <a:latin typeface="Arial"/>
-              </a:defRPr>
-            </a:pPr>
-            <a:r>
-              <a:t>• Mid bid-ask préféré au last price souvent ancien.</a:t>
+              <a:defRPr sz="1400">
+                <a:solidFill>
+                  <a:srgbClr val="27313A"/>
+                </a:solidFill>
+                <a:latin typeface="Arial"/>
+              </a:defRPr>
+            </a:pPr>
+            <a:r>
+              <a:t>• Cboe gratuit : prototype ponctuel ; Bloomberg : historique et stratégie.</a:t>
+            </a:r>
+          </a:p>
+        </p:txBody>
+      </p:sp>
+      <p:sp>
+        <p:nvSpPr>
+          <p:cNvPr id="16" name="TextBox 15"/>
+          <p:cNvSpPr txBox="1"/>
+          <p:nvPr/>
+        </p:nvSpPr>
+        <p:spPr>
+          <a:xfrm>
+            <a:off x="731520" y="5961888"/>
+            <a:ext cx="6583680" cy="320040"/>
+          </a:xfrm>
+          <a:prstGeom prst="rect">
+            <a:avLst/>
+          </a:prstGeom>
+          <a:noFill/>
+        </p:spPr>
+        <p:txBody>
+          <a:bodyPr wrap="square" lIns="0" rIns="0">
+            <a:spAutoFit/>
+          </a:bodyPr>
+          <a:lstStyle/>
+          <a:p>
+            <a:pPr algn="ctr">
+              <a:defRPr sz="900" b="0">
+                <a:solidFill>
+                  <a:srgbClr val="59636C"/>
+                </a:solidFill>
+                <a:latin typeface="Arial"/>
+              </a:defRPr>
+            </a:pPr>
+            <a:r>
+              <a:t>Snapshot Cboe différé du 16/10/2026 à 17:12:17.</a:t>
             </a:r>
           </a:p>
         </p:txBody>
@@ -5028,14 +5533,14 @@
         </p:nvSpPr>
         <p:spPr>
           <a:xfrm>
-            <a:off x="0" y="0"/>
-            <a:ext cx="12191695" cy="164592"/>
+            <a:off x="530352" y="868680"/>
+            <a:ext cx="11109960" cy="16459"/>
           </a:xfrm>
           <a:prstGeom prst="rect">
             <a:avLst/>
           </a:prstGeom>
           <a:solidFill>
-            <a:srgbClr val="153A5B"/>
+            <a:srgbClr val="111111"/>
           </a:solidFill>
           <a:ln>
             <a:noFill/>
@@ -5071,8 +5576,8 @@
         </p:nvSpPr>
         <p:spPr>
           <a:xfrm>
-            <a:off x="594360" y="347472"/>
-            <a:ext cx="10881360" cy="566928"/>
+            <a:off x="566928" y="274320"/>
+            <a:ext cx="10881360" cy="502920"/>
           </a:xfrm>
           <a:prstGeom prst="rect">
             <a:avLst/>
@@ -5088,13 +5593,13 @@
             <a:pPr>
               <a:defRPr b="1" sz="2500">
                 <a:solidFill>
-                  <a:srgbClr val="153A5B"/>
-                </a:solidFill>
-                <a:latin typeface="Arial"/>
-              </a:defRPr>
-            </a:pPr>
-            <a:r>
-              <a:t>3. Pipeline de nettoyage</a:t>
+                  <a:srgbClr val="111111"/>
+                </a:solidFill>
+                <a:latin typeface="Arial"/>
+              </a:defRPr>
+            </a:pPr>
+            <a:r>
+              <a:t>3. Identités théoriques utilisées</a:t>
             </a:r>
           </a:p>
         </p:txBody>
@@ -5107,8 +5612,8 @@
         </p:nvSpPr>
         <p:spPr>
           <a:xfrm>
-            <a:off x="594360" y="6510528"/>
-            <a:ext cx="10972800" cy="182880"/>
+            <a:off x="566928" y="6510528"/>
+            <a:ext cx="10972800" cy="164592"/>
           </a:xfrm>
           <a:prstGeom prst="rect">
             <a:avLst/>
@@ -5124,80 +5629,27 @@
             <a:pPr>
               <a:defRPr sz="800">
                 <a:solidFill>
-                  <a:srgbClr val="60717D"/>
-                </a:solidFill>
-                <a:latin typeface="Arial"/>
-              </a:defRPr>
-            </a:pPr>
-            <a:r>
-              <a:t>Projet PI² n°176 — Suivi n°1     4/10</a:t>
-            </a:r>
-          </a:p>
-        </p:txBody>
-      </p:sp>
-      <p:sp>
-        <p:nvSpPr>
-          <p:cNvPr id="6" name="Oval 5"/>
-          <p:cNvSpPr/>
-          <p:nvPr/>
-        </p:nvSpPr>
-        <p:spPr>
-          <a:xfrm>
-            <a:off x="822960" y="1051560"/>
-            <a:ext cx="566928" cy="566928"/>
-          </a:xfrm>
-          <a:prstGeom prst="ellipse">
-            <a:avLst/>
-          </a:prstGeom>
-          <a:solidFill>
-            <a:srgbClr val="168AAD"/>
-          </a:solidFill>
-          <a:ln>
-            <a:noFill/>
-          </a:ln>
-        </p:spPr>
-        <p:style>
-          <a:lnRef idx="1">
-            <a:schemeClr val="accent1"/>
-          </a:lnRef>
-          <a:fillRef idx="3">
-            <a:schemeClr val="accent1"/>
-          </a:fillRef>
-          <a:effectRef idx="2">
-            <a:schemeClr val="accent1"/>
-          </a:effectRef>
-          <a:fontRef idx="minor">
-            <a:schemeClr val="lt1"/>
-          </a:fontRef>
-        </p:style>
-        <p:txBody>
-          <a:bodyPr rtlCol="0" anchor="ctr"/>
-          <a:lstStyle/>
-          <a:p>
-            <a:pPr algn="ctr">
-              <a:defRPr b="1" sz="1800">
-                <a:solidFill>
-                  <a:srgbClr val="FFFFFF"/>
-                </a:solidFill>
-                <a:latin typeface="Arial"/>
-              </a:defRPr>
-            </a:pPr>
-            <a:r>
-              <a:t>1</a:t>
-            </a:r>
-          </a:p>
-        </p:txBody>
-      </p:sp>
-      <p:sp>
-        <p:nvSpPr>
-          <p:cNvPr id="7" name="TextBox 6"/>
+                  <a:srgbClr val="59636C"/>
+                </a:solidFill>
+                <a:latin typeface="Arial"/>
+              </a:defRPr>
+            </a:pPr>
+            <a:r>
+              <a:t>Projet PI² n°176  ·  Suivi n°1  ·  23 octobre 2026                                      4/11</a:t>
+            </a:r>
+          </a:p>
+        </p:txBody>
+      </p:sp>
+      <p:sp>
+        <p:nvSpPr>
+          <p:cNvPr id="6" name="TextBox 5"/>
           <p:cNvSpPr txBox="1"/>
           <p:nvPr/>
         </p:nvSpPr>
         <p:spPr>
           <a:xfrm>
-            <a:off x="1600200" y="1033271"/>
-            <a:ext cx="4572000" cy="640080"/>
+            <a:off x="731520" y="1078992"/>
+            <a:ext cx="10789920" cy="320040"/>
           </a:xfrm>
           <a:prstGeom prst="rect">
             <a:avLst/>
@@ -5205,88 +5657,59 @@
           <a:noFill/>
         </p:spPr>
         <p:txBody>
-          <a:bodyPr wrap="none">
+          <a:bodyPr wrap="square" lIns="0" rIns="0">
             <a:spAutoFit/>
           </a:bodyPr>
           <a:lstStyle/>
           <a:p>
-            <a:pPr>
-              <a:defRPr sz="1900">
-                <a:solidFill>
-                  <a:srgbClr val="24323D"/>
-                </a:solidFill>
-                <a:latin typeface="Arial"/>
-              </a:defRPr>
-            </a:pPr>
-            <a:r>
-              <a:t>Sélection échéance ≈ 3 mois</a:t>
-            </a:r>
-          </a:p>
-        </p:txBody>
-      </p:sp>
-      <p:sp>
-        <p:nvSpPr>
-          <p:cNvPr id="8" name="Oval 7"/>
-          <p:cNvSpPr/>
-          <p:nvPr/>
-        </p:nvSpPr>
-        <p:spPr>
-          <a:xfrm>
-            <a:off x="822960" y="2011680"/>
-            <a:ext cx="566928" cy="566928"/>
-          </a:xfrm>
-          <a:prstGeom prst="ellipse">
-            <a:avLst/>
-          </a:prstGeom>
-          <a:solidFill>
-            <a:srgbClr val="168AAD"/>
-          </a:solidFill>
-          <a:ln>
-            <a:noFill/>
-          </a:ln>
-        </p:spPr>
-        <p:style>
-          <a:lnRef idx="1">
-            <a:schemeClr val="accent1"/>
-          </a:lnRef>
-          <a:fillRef idx="3">
-            <a:schemeClr val="accent1"/>
-          </a:fillRef>
-          <a:effectRef idx="2">
-            <a:schemeClr val="accent1"/>
-          </a:effectRef>
-          <a:fontRef idx="minor">
-            <a:schemeClr val="lt1"/>
-          </a:fontRef>
-        </p:style>
-        <p:txBody>
-          <a:bodyPr rtlCol="0" anchor="ctr"/>
-          <a:lstStyle/>
-          <a:p>
-            <a:pPr algn="ctr">
-              <a:defRPr b="1" sz="1800">
-                <a:solidFill>
-                  <a:srgbClr val="FFFFFF"/>
-                </a:solidFill>
-                <a:latin typeface="Arial"/>
-              </a:defRPr>
-            </a:pPr>
-            <a:r>
-              <a:t>2</a:t>
-            </a:r>
-          </a:p>
-        </p:txBody>
-      </p:sp>
-      <p:sp>
-        <p:nvSpPr>
-          <p:cNvPr id="9" name="TextBox 8"/>
+            <a:pPr algn="l">
+              <a:defRPr sz="1600" b="1">
+                <a:solidFill>
+                  <a:srgbClr val="111111"/>
+                </a:solidFill>
+                <a:latin typeface="Arial"/>
+              </a:defRPr>
+            </a:pPr>
+            <a:r>
+              <a:t>Prix du call sous la mesure risque-neutre</a:t>
+            </a:r>
+          </a:p>
+        </p:txBody>
+      </p:sp>
+      <p:pic>
+        <p:nvPicPr>
+          <p:cNvPr id="7" name="Picture 6" descr="eq_call.png"/>
+          <p:cNvPicPr>
+            <a:picLocks noChangeAspect="1"/>
+          </p:cNvPicPr>
+          <p:nvPr/>
+        </p:nvPicPr>
+        <p:blipFill>
+          <a:blip r:embed="rId2"/>
+          <a:stretch>
+            <a:fillRect/>
+          </a:stretch>
+        </p:blipFill>
+        <p:spPr>
+          <a:xfrm>
+            <a:off x="3231615" y="1389888"/>
+            <a:ext cx="5698288" cy="658368"/>
+          </a:xfrm>
+          <a:prstGeom prst="rect">
+            <a:avLst/>
+          </a:prstGeom>
+        </p:spPr>
+      </p:pic>
+      <p:sp>
+        <p:nvSpPr>
+          <p:cNvPr id="8" name="TextBox 7"/>
           <p:cNvSpPr txBox="1"/>
           <p:nvPr/>
         </p:nvSpPr>
         <p:spPr>
           <a:xfrm>
-            <a:off x="1600200" y="1993392"/>
-            <a:ext cx="4572000" cy="640080"/>
+            <a:off x="731520" y="2331720"/>
+            <a:ext cx="10789920" cy="320040"/>
           </a:xfrm>
           <a:prstGeom prst="rect">
             <a:avLst/>
@@ -5294,88 +5717,59 @@
           <a:noFill/>
         </p:spPr>
         <p:txBody>
-          <a:bodyPr wrap="none">
+          <a:bodyPr wrap="square" lIns="0" rIns="0">
             <a:spAutoFit/>
           </a:bodyPr>
           <a:lstStyle/>
           <a:p>
-            <a:pPr>
-              <a:defRPr sz="1900">
-                <a:solidFill>
-                  <a:srgbClr val="24323D"/>
-                </a:solidFill>
-                <a:latin typeface="Arial"/>
-              </a:defRPr>
-            </a:pPr>
-            <a:r>
-              <a:t>Contrôles bid–ask et spreads</a:t>
-            </a:r>
-          </a:p>
-        </p:txBody>
-      </p:sp>
-      <p:sp>
-        <p:nvSpPr>
-          <p:cNvPr id="10" name="Oval 9"/>
-          <p:cNvSpPr/>
-          <p:nvPr/>
-        </p:nvSpPr>
-        <p:spPr>
-          <a:xfrm>
-            <a:off x="822960" y="2971800"/>
-            <a:ext cx="566928" cy="566928"/>
-          </a:xfrm>
-          <a:prstGeom prst="ellipse">
-            <a:avLst/>
-          </a:prstGeom>
-          <a:solidFill>
-            <a:srgbClr val="168AAD"/>
-          </a:solidFill>
-          <a:ln>
-            <a:noFill/>
-          </a:ln>
-        </p:spPr>
-        <p:style>
-          <a:lnRef idx="1">
-            <a:schemeClr val="accent1"/>
-          </a:lnRef>
-          <a:fillRef idx="3">
-            <a:schemeClr val="accent1"/>
-          </a:fillRef>
-          <a:effectRef idx="2">
-            <a:schemeClr val="accent1"/>
-          </a:effectRef>
-          <a:fontRef idx="minor">
-            <a:schemeClr val="lt1"/>
-          </a:fontRef>
-        </p:style>
-        <p:txBody>
-          <a:bodyPr rtlCol="0" anchor="ctr"/>
-          <a:lstStyle/>
-          <a:p>
-            <a:pPr algn="ctr">
-              <a:defRPr b="1" sz="1800">
-                <a:solidFill>
-                  <a:srgbClr val="FFFFFF"/>
-                </a:solidFill>
-                <a:latin typeface="Arial"/>
-              </a:defRPr>
-            </a:pPr>
-            <a:r>
-              <a:t>3</a:t>
-            </a:r>
-          </a:p>
-        </p:txBody>
-      </p:sp>
-      <p:sp>
-        <p:nvSpPr>
-          <p:cNvPr id="11" name="TextBox 10"/>
+            <a:pPr algn="l">
+              <a:defRPr sz="1600" b="1">
+                <a:solidFill>
+                  <a:srgbClr val="111111"/>
+                </a:solidFill>
+                <a:latin typeface="Arial"/>
+              </a:defRPr>
+            </a:pPr>
+            <a:r>
+              <a:t>Estimation conjointe du forward et de l’actualisation</a:t>
+            </a:r>
+          </a:p>
+        </p:txBody>
+      </p:sp>
+      <p:pic>
+        <p:nvPicPr>
+          <p:cNvPr id="9" name="Picture 8" descr="eq_parity.png"/>
+          <p:cNvPicPr>
+            <a:picLocks noChangeAspect="1"/>
+          </p:cNvPicPr>
+          <p:nvPr/>
+        </p:nvPicPr>
+        <p:blipFill>
+          <a:blip r:embed="rId3"/>
+          <a:stretch>
+            <a:fillRect/>
+          </a:stretch>
+        </p:blipFill>
+        <p:spPr>
+          <a:xfrm>
+            <a:off x="2459736" y="2633472"/>
+            <a:ext cx="7242048" cy="658368"/>
+          </a:xfrm>
+          <a:prstGeom prst="rect">
+            <a:avLst/>
+          </a:prstGeom>
+        </p:spPr>
+      </p:pic>
+      <p:sp>
+        <p:nvSpPr>
+          <p:cNvPr id="10" name="TextBox 9"/>
           <p:cNvSpPr txBox="1"/>
           <p:nvPr/>
         </p:nvSpPr>
         <p:spPr>
           <a:xfrm>
-            <a:off x="1600200" y="2953512"/>
-            <a:ext cx="4572000" cy="640080"/>
+            <a:off x="731520" y="3593592"/>
+            <a:ext cx="10789920" cy="320040"/>
           </a:xfrm>
           <a:prstGeom prst="rect">
             <a:avLst/>
@@ -5383,88 +5777,59 @@
           <a:noFill/>
         </p:spPr>
         <p:txBody>
-          <a:bodyPr wrap="none">
+          <a:bodyPr wrap="square" lIns="0" rIns="0">
             <a:spAutoFit/>
           </a:bodyPr>
           <a:lstStyle/>
           <a:p>
-            <a:pPr>
-              <a:defRPr sz="1900">
-                <a:solidFill>
-                  <a:srgbClr val="24323D"/>
-                </a:solidFill>
-                <a:latin typeface="Arial"/>
-              </a:defRPr>
-            </a:pPr>
-            <a:r>
-              <a:t>Parité call-put : F et D</a:t>
-            </a:r>
-          </a:p>
-        </p:txBody>
-      </p:sp>
-      <p:sp>
-        <p:nvSpPr>
-          <p:cNvPr id="12" name="Oval 11"/>
-          <p:cNvSpPr/>
-          <p:nvPr/>
-        </p:nvSpPr>
-        <p:spPr>
-          <a:xfrm>
-            <a:off x="822960" y="3931920"/>
-            <a:ext cx="566928" cy="566928"/>
-          </a:xfrm>
-          <a:prstGeom prst="ellipse">
-            <a:avLst/>
-          </a:prstGeom>
-          <a:solidFill>
-            <a:srgbClr val="168AAD"/>
-          </a:solidFill>
-          <a:ln>
-            <a:noFill/>
-          </a:ln>
-        </p:spPr>
-        <p:style>
-          <a:lnRef idx="1">
-            <a:schemeClr val="accent1"/>
-          </a:lnRef>
-          <a:fillRef idx="3">
-            <a:schemeClr val="accent1"/>
-          </a:fillRef>
-          <a:effectRef idx="2">
-            <a:schemeClr val="accent1"/>
-          </a:effectRef>
-          <a:fontRef idx="minor">
-            <a:schemeClr val="lt1"/>
-          </a:fontRef>
-        </p:style>
-        <p:txBody>
-          <a:bodyPr rtlCol="0" anchor="ctr"/>
-          <a:lstStyle/>
-          <a:p>
-            <a:pPr algn="ctr">
-              <a:defRPr b="1" sz="1800">
-                <a:solidFill>
-                  <a:srgbClr val="FFFFFF"/>
-                </a:solidFill>
-                <a:latin typeface="Arial"/>
-              </a:defRPr>
-            </a:pPr>
-            <a:r>
-              <a:t>4</a:t>
-            </a:r>
-          </a:p>
-        </p:txBody>
-      </p:sp>
-      <p:sp>
-        <p:nvSpPr>
-          <p:cNvPr id="13" name="TextBox 12"/>
+            <a:pPr algn="l">
+              <a:defRPr sz="1600" b="1">
+                <a:solidFill>
+                  <a:srgbClr val="111111"/>
+                </a:solidFill>
+                <a:latin typeface="Arial"/>
+              </a:defRPr>
+            </a:pPr>
+            <a:r>
+              <a:t>Extraction de la densité</a:t>
+            </a:r>
+          </a:p>
+        </p:txBody>
+      </p:sp>
+      <p:pic>
+        <p:nvPicPr>
+          <p:cNvPr id="11" name="Picture 10" descr="eq_bl.png"/>
+          <p:cNvPicPr>
+            <a:picLocks noChangeAspect="1"/>
+          </p:cNvPicPr>
+          <p:nvPr/>
+        </p:nvPicPr>
+        <p:blipFill>
+          <a:blip r:embed="rId4"/>
+          <a:stretch>
+            <a:fillRect/>
+          </a:stretch>
+        </p:blipFill>
+        <p:spPr>
+          <a:xfrm>
+            <a:off x="4419619" y="3895344"/>
+            <a:ext cx="3322280" cy="713232"/>
+          </a:xfrm>
+          <a:prstGeom prst="rect">
+            <a:avLst/>
+          </a:prstGeom>
+        </p:spPr>
+      </p:pic>
+      <p:sp>
+        <p:nvSpPr>
+          <p:cNvPr id="12" name="TextBox 11"/>
           <p:cNvSpPr txBox="1"/>
           <p:nvPr/>
         </p:nvSpPr>
         <p:spPr>
           <a:xfrm>
-            <a:off x="1600200" y="3913632"/>
-            <a:ext cx="4572000" cy="640080"/>
+            <a:off x="914400" y="4937760"/>
+            <a:ext cx="10241280" cy="1097280"/>
           </a:xfrm>
           <a:prstGeom prst="rect">
             <a:avLst/>
@@ -5472,132 +5837,7 @@
           <a:noFill/>
         </p:spPr>
         <p:txBody>
-          <a:bodyPr wrap="none">
-            <a:spAutoFit/>
-          </a:bodyPr>
-          <a:lstStyle/>
-          <a:p>
-            <a:pPr>
-              <a:defRPr sz="1900">
-                <a:solidFill>
-                  <a:srgbClr val="24323D"/>
-                </a:solidFill>
-                <a:latin typeface="Arial"/>
-              </a:defRPr>
-            </a:pPr>
-            <a:r>
-              <a:t>OTM calls + puts synthétiques</a:t>
-            </a:r>
-          </a:p>
-        </p:txBody>
-      </p:sp>
-      <p:sp>
-        <p:nvSpPr>
-          <p:cNvPr id="14" name="Oval 13"/>
-          <p:cNvSpPr/>
-          <p:nvPr/>
-        </p:nvSpPr>
-        <p:spPr>
-          <a:xfrm>
-            <a:off x="822960" y="4892040"/>
-            <a:ext cx="566928" cy="566928"/>
-          </a:xfrm>
-          <a:prstGeom prst="ellipse">
-            <a:avLst/>
-          </a:prstGeom>
-          <a:solidFill>
-            <a:srgbClr val="168AAD"/>
-          </a:solidFill>
-          <a:ln>
-            <a:noFill/>
-          </a:ln>
-        </p:spPr>
-        <p:style>
-          <a:lnRef idx="1">
-            <a:schemeClr val="accent1"/>
-          </a:lnRef>
-          <a:fillRef idx="3">
-            <a:schemeClr val="accent1"/>
-          </a:fillRef>
-          <a:effectRef idx="2">
-            <a:schemeClr val="accent1"/>
-          </a:effectRef>
-          <a:fontRef idx="minor">
-            <a:schemeClr val="lt1"/>
-          </a:fontRef>
-        </p:style>
-        <p:txBody>
-          <a:bodyPr rtlCol="0" anchor="ctr"/>
-          <a:lstStyle/>
-          <a:p>
-            <a:pPr algn="ctr">
-              <a:defRPr b="1" sz="1800">
-                <a:solidFill>
-                  <a:srgbClr val="FFFFFF"/>
-                </a:solidFill>
-                <a:latin typeface="Arial"/>
-              </a:defRPr>
-            </a:pPr>
-            <a:r>
-              <a:t>5</a:t>
-            </a:r>
-          </a:p>
-        </p:txBody>
-      </p:sp>
-      <p:sp>
-        <p:nvSpPr>
-          <p:cNvPr id="15" name="TextBox 14"/>
-          <p:cNvSpPr txBox="1"/>
-          <p:nvPr/>
-        </p:nvSpPr>
-        <p:spPr>
-          <a:xfrm>
-            <a:off x="1600200" y="4873752"/>
-            <a:ext cx="4572000" cy="640080"/>
-          </a:xfrm>
-          <a:prstGeom prst="rect">
-            <a:avLst/>
-          </a:prstGeom>
-          <a:noFill/>
-        </p:spPr>
-        <p:txBody>
-          <a:bodyPr wrap="none">
-            <a:spAutoFit/>
-          </a:bodyPr>
-          <a:lstStyle/>
-          <a:p>
-            <a:pPr>
-              <a:defRPr sz="1900">
-                <a:solidFill>
-                  <a:srgbClr val="24323D"/>
-                </a:solidFill>
-                <a:latin typeface="Arial"/>
-              </a:defRPr>
-            </a:pPr>
-            <a:r>
-              <a:t>Grille commune log(K/F)</a:t>
-            </a:r>
-          </a:p>
-        </p:txBody>
-      </p:sp>
-      <p:sp>
-        <p:nvSpPr>
-          <p:cNvPr id="16" name="TextBox 15"/>
-          <p:cNvSpPr txBox="1"/>
-          <p:nvPr/>
-        </p:nvSpPr>
-        <p:spPr>
-          <a:xfrm>
-            <a:off x="6492240" y="1508760"/>
-            <a:ext cx="4663440" cy="3383280"/>
-          </a:xfrm>
-          <a:prstGeom prst="rect">
-            <a:avLst/>
-          </a:prstGeom>
-          <a:noFill/>
-        </p:spPr>
-        <p:txBody>
-          <a:bodyPr wrap="square" lIns="45720" rIns="27432">
+          <a:bodyPr wrap="square" lIns="18288" rIns="0">
             <a:spAutoFit/>
           </a:bodyPr>
           <a:lstStyle/>
@@ -5606,15 +5846,15 @@
               <a:spcAft>
                 <a:spcPts val="1000"/>
               </a:spcAft>
-              <a:defRPr sz="1800">
-                <a:solidFill>
-                  <a:srgbClr val="24323D"/>
-                </a:solidFill>
-                <a:latin typeface="Arial"/>
-              </a:defRPr>
-            </a:pPr>
-            <a:r>
-              <a:t>• Exclus : bid nul, marché croisé, spread relatif &gt; 35 %.</a:t>
+              <a:defRPr sz="1400">
+                <a:solidFill>
+                  <a:srgbClr val="27313A"/>
+                </a:solidFill>
+                <a:latin typeface="Arial"/>
+              </a:defRPr>
+            </a:pPr>
+            <a:r>
+              <a:t>• Options européennes, même sous-jacent et même échéance.</a:t>
             </a:r>
           </a:p>
           <a:p>
@@ -5622,15 +5862,15 @@
               <a:spcAft>
                 <a:spcPts val="1000"/>
               </a:spcAft>
-              <a:defRPr sz="1800">
-                <a:solidFill>
-                  <a:srgbClr val="24323D"/>
-                </a:solidFill>
-                <a:latin typeface="Arial"/>
-              </a:defRPr>
-            </a:pPr>
-            <a:r>
-              <a:t>• Volume et open interest conservés comme diagnostics.</a:t>
+              <a:defRPr sz="1400">
+                <a:solidFill>
+                  <a:srgbClr val="27313A"/>
+                </a:solidFill>
+                <a:latin typeface="Arial"/>
+              </a:defRPr>
+            </a:pPr>
+            <a:r>
+              <a:t>• La convexité de C(K,T) garantit q(K,T) ≥ 0 en absence d’arbitrage.</a:t>
             </a:r>
           </a:p>
           <a:p>
@@ -5638,15 +5878,15 @@
               <a:spcAft>
                 <a:spcPts val="1000"/>
               </a:spcAft>
-              <a:defRPr sz="1800">
-                <a:solidFill>
-                  <a:srgbClr val="24323D"/>
-                </a:solidFill>
-                <a:latin typeface="Arial"/>
-              </a:defRPr>
-            </a:pPr>
-            <a:r>
-              <a:t>• Tous les seuils seront testés en sensibilité.</a:t>
+              <a:defRPr sz="1400">
+                <a:solidFill>
+                  <a:srgbClr val="27313A"/>
+                </a:solidFill>
+                <a:latin typeface="Arial"/>
+              </a:defRPr>
+            </a:pPr>
+            <a:r>
+              <a:t>• La double dérivation impose de lisser avant de dériver.</a:t>
             </a:r>
           </a:p>
         </p:txBody>
@@ -5720,14 +5960,14 @@
         </p:nvSpPr>
         <p:spPr>
           <a:xfrm>
-            <a:off x="0" y="0"/>
-            <a:ext cx="12191695" cy="164592"/>
+            <a:off x="530352" y="868680"/>
+            <a:ext cx="11109960" cy="16459"/>
           </a:xfrm>
           <a:prstGeom prst="rect">
             <a:avLst/>
           </a:prstGeom>
           <a:solidFill>
-            <a:srgbClr val="153A5B"/>
+            <a:srgbClr val="111111"/>
           </a:solidFill>
           <a:ln>
             <a:noFill/>
@@ -5763,8 +6003,8 @@
         </p:nvSpPr>
         <p:spPr>
           <a:xfrm>
-            <a:off x="594360" y="347472"/>
-            <a:ext cx="10881360" cy="566928"/>
+            <a:off x="566928" y="274320"/>
+            <a:ext cx="10881360" cy="502920"/>
           </a:xfrm>
           <a:prstGeom prst="rect">
             <a:avLst/>
@@ -5780,13 +6020,13 @@
             <a:pPr>
               <a:defRPr b="1" sz="2500">
                 <a:solidFill>
-                  <a:srgbClr val="153A5B"/>
-                </a:solidFill>
-                <a:latin typeface="Arial"/>
-              </a:defRPr>
-            </a:pPr>
-            <a:r>
-              <a:t>4. Calibration commune : SVI</a:t>
+                  <a:srgbClr val="111111"/>
+                </a:solidFill>
+                <a:latin typeface="Arial"/>
+              </a:defRPr>
+            </a:pPr>
+            <a:r>
+              <a:t>4. Une smile commune : calibration SVI</a:t>
             </a:r>
           </a:p>
         </p:txBody>
@@ -5799,8 +6039,8 @@
         </p:nvSpPr>
         <p:spPr>
           <a:xfrm>
-            <a:off x="594360" y="6510528"/>
-            <a:ext cx="10972800" cy="182880"/>
+            <a:off x="566928" y="6510528"/>
+            <a:ext cx="10972800" cy="164592"/>
           </a:xfrm>
           <a:prstGeom prst="rect">
             <a:avLst/>
@@ -5816,13 +6056,13 @@
             <a:pPr>
               <a:defRPr sz="800">
                 <a:solidFill>
-                  <a:srgbClr val="60717D"/>
-                </a:solidFill>
-                <a:latin typeface="Arial"/>
-              </a:defRPr>
-            </a:pPr>
-            <a:r>
-              <a:t>Projet PI² n°176 — Suivi n°1     5/10</a:t>
+                  <a:srgbClr val="59636C"/>
+                </a:solidFill>
+                <a:latin typeface="Arial"/>
+              </a:defRPr>
+            </a:pPr>
+            <a:r>
+              <a:t>Projet PI² n°176  ·  Suivi n°1  ·  23 octobre 2026                                      5/11</a:t>
             </a:r>
           </a:p>
         </p:txBody>
@@ -5843,24 +6083,48 @@
         </p:blipFill>
         <p:spPr>
           <a:xfrm>
-            <a:off x="685800" y="1143000"/>
-            <a:ext cx="6858000" cy="4480560"/>
+            <a:off x="411480" y="1340741"/>
+            <a:ext cx="6583680" cy="3673597"/>
           </a:xfrm>
           <a:prstGeom prst="rect">
             <a:avLst/>
           </a:prstGeom>
         </p:spPr>
       </p:pic>
-      <p:sp>
-        <p:nvSpPr>
-          <p:cNvPr id="7" name="TextBox 6"/>
+      <p:pic>
+        <p:nvPicPr>
+          <p:cNvPr id="7" name="Picture 6" descr="eq_svi.png"/>
+          <p:cNvPicPr>
+            <a:picLocks noChangeAspect="1"/>
+          </p:cNvPicPr>
+          <p:nvPr/>
+        </p:nvPicPr>
+        <p:blipFill>
+          <a:blip r:embed="rId3"/>
+          <a:stretch>
+            <a:fillRect/>
+          </a:stretch>
+        </p:blipFill>
+        <p:spPr>
+          <a:xfrm>
+            <a:off x="6903720" y="1412627"/>
+            <a:ext cx="4892040" cy="366000"/>
+          </a:xfrm>
+          <a:prstGeom prst="rect">
+            <a:avLst/>
+          </a:prstGeom>
+        </p:spPr>
+      </p:pic>
+      <p:sp>
+        <p:nvSpPr>
+          <p:cNvPr id="8" name="TextBox 7"/>
           <p:cNvSpPr txBox="1"/>
           <p:nvPr/>
         </p:nvSpPr>
         <p:spPr>
           <a:xfrm>
-            <a:off x="7818120" y="1417320"/>
-            <a:ext cx="3611880" cy="4114800"/>
+            <a:off x="7086600" y="2331720"/>
+            <a:ext cx="4434840" cy="3063240"/>
           </a:xfrm>
           <a:prstGeom prst="rect">
             <a:avLst/>
@@ -5868,7 +6132,7 @@
           <a:noFill/>
         </p:spPr>
         <p:txBody>
-          <a:bodyPr wrap="square" lIns="45720" rIns="27432">
+          <a:bodyPr wrap="square" lIns="18288" rIns="0">
             <a:spAutoFit/>
           </a:bodyPr>
           <a:lstStyle/>
@@ -5877,15 +6141,15 @@
               <a:spcAft>
                 <a:spcPts val="1000"/>
               </a:spcAft>
-              <a:defRPr sz="1700">
-                <a:solidFill>
-                  <a:srgbClr val="24323D"/>
-                </a:solidFill>
-                <a:latin typeface="Arial"/>
-              </a:defRPr>
-            </a:pPr>
-            <a:r>
-              <a:t>• 5 paramètres pour toute la coupe de strikes.</a:t>
+              <a:defRPr sz="1500">
+                <a:solidFill>
+                  <a:srgbClr val="27313A"/>
+                </a:solidFill>
+                <a:latin typeface="Arial"/>
+              </a:defRPr>
+            </a:pPr>
+            <a:r>
+              <a:t>• Un seul vecteur de cinq paramètres pour les 338 options.</a:t>
             </a:r>
           </a:p>
           <a:p>
@@ -5893,15 +6157,15 @@
               <a:spcAft>
                 <a:spcPts val="1000"/>
               </a:spcAft>
-              <a:defRPr sz="1700">
-                <a:solidFill>
-                  <a:srgbClr val="24323D"/>
-                </a:solidFill>
-                <a:latin typeface="Arial"/>
-              </a:defRPr>
-            </a:pPr>
-            <a:r>
-              <a:t>• Forward estimé : 7,755.9</a:t>
+              <a:defRPr sz="1500">
+                <a:solidFill>
+                  <a:srgbClr val="27313A"/>
+                </a:solidFill>
+                <a:latin typeface="Arial"/>
+              </a:defRPr>
+            </a:pPr>
+            <a:r>
+              <a:t>• F = 7,755.89 ; D = 0.98837 ; r = 4.69 %.</a:t>
             </a:r>
           </a:p>
           <a:p>
@@ -5909,15 +6173,15 @@
               <a:spcAft>
                 <a:spcPts val="1000"/>
               </a:spcAft>
-              <a:defRPr sz="1700">
-                <a:solidFill>
-                  <a:srgbClr val="24323D"/>
-                </a:solidFill>
-                <a:latin typeface="Arial"/>
-              </a:defRPr>
-            </a:pPr>
-            <a:r>
-              <a:t>• Taux continu implicite : 4.69 %</a:t>
+              <a:defRPr sz="1500">
+                <a:solidFill>
+                  <a:srgbClr val="27313A"/>
+                </a:solidFill>
+                <a:latin typeface="Arial"/>
+              </a:defRPr>
+            </a:pPr>
+            <a:r>
+              <a:t>• RMSE de parité = 0.118 point.</a:t>
             </a:r>
           </a:p>
           <a:p>
@@ -5925,15 +6189,15 @@
               <a:spcAft>
                 <a:spcPts val="1000"/>
               </a:spcAft>
-              <a:defRPr sz="1700">
-                <a:solidFill>
-                  <a:srgbClr val="24323D"/>
-                </a:solidFill>
-                <a:latin typeface="Arial"/>
-              </a:defRPr>
-            </a:pPr>
-            <a:r>
-              <a:t>• RMSE des calls : 1.144 point</a:t>
+              <a:defRPr sz="1500">
+                <a:solidFill>
+                  <a:srgbClr val="27313A"/>
+                </a:solidFill>
+                <a:latin typeface="Arial"/>
+              </a:defRPr>
+            </a:pPr>
+            <a:r>
+              <a:t>• RMSE de reconstruction = 1.144 point.</a:t>
             </a:r>
           </a:p>
           <a:p>
@@ -5941,15 +6205,51 @@
               <a:spcAft>
                 <a:spcPts val="1000"/>
               </a:spcAft>
-              <a:defRPr sz="1700">
-                <a:solidFill>
-                  <a:srgbClr val="24323D"/>
-                </a:solidFill>
-                <a:latin typeface="Arial"/>
-              </a:defRPr>
-            </a:pPr>
-            <a:r>
-              <a:t>• ρ = -0.051 ; σ = 0.268</a:t>
+              <a:defRPr sz="1500">
+                <a:solidFill>
+                  <a:srgbClr val="27313A"/>
+                </a:solidFill>
+                <a:latin typeface="Arial"/>
+              </a:defRPr>
+            </a:pPr>
+            <a:r>
+              <a:t>• ρ = -0.051 ; σ = 0.268.</a:t>
+            </a:r>
+          </a:p>
+        </p:txBody>
+      </p:sp>
+      <p:sp>
+        <p:nvSpPr>
+          <p:cNvPr id="9" name="TextBox 8"/>
+          <p:cNvSpPr txBox="1"/>
+          <p:nvPr/>
+        </p:nvSpPr>
+        <p:spPr>
+          <a:xfrm>
+            <a:off x="822960" y="5833872"/>
+            <a:ext cx="10607040" cy="347472"/>
+          </a:xfrm>
+          <a:prstGeom prst="rect">
+            <a:avLst/>
+          </a:prstGeom>
+          <a:noFill/>
+        </p:spPr>
+        <p:txBody>
+          <a:bodyPr wrap="square" lIns="0" rIns="0">
+            <a:spAutoFit/>
+          </a:bodyPr>
+          <a:lstStyle/>
+          <a:p>
+            <a:pPr algn="ctr">
+              <a:defRPr sz="1500" b="1">
+                <a:solidFill>
+                  <a:srgbClr val="111111"/>
+                </a:solidFill>
+                <a:latin typeface="Arial"/>
+              </a:defRPr>
+            </a:pPr>
+            <a:r>
+              <a:t>SVI lisse la coupe ; Breeden–Litzenberger reste la méthode d’extraction.</a:t>
             </a:r>
           </a:p>
         </p:txBody>
@@ -6023,14 +6323,14 @@
         </p:nvSpPr>
         <p:spPr>
           <a:xfrm>
-            <a:off x="0" y="0"/>
-            <a:ext cx="12191695" cy="164592"/>
+            <a:off x="530352" y="868680"/>
+            <a:ext cx="11109960" cy="16459"/>
           </a:xfrm>
           <a:prstGeom prst="rect">
             <a:avLst/>
           </a:prstGeom>
           <a:solidFill>
-            <a:srgbClr val="153A5B"/>
+            <a:srgbClr val="111111"/>
           </a:solidFill>
           <a:ln>
             <a:noFill/>
@@ -6066,8 +6366,8 @@
         </p:nvSpPr>
         <p:spPr>
           <a:xfrm>
-            <a:off x="594360" y="347472"/>
-            <a:ext cx="10881360" cy="566928"/>
+            <a:off x="566928" y="274320"/>
+            <a:ext cx="10881360" cy="502920"/>
           </a:xfrm>
           <a:prstGeom prst="rect">
             <a:avLst/>
@@ -6083,13 +6383,13 @@
             <a:pPr>
               <a:defRPr b="1" sz="2500">
                 <a:solidFill>
-                  <a:srgbClr val="153A5B"/>
-                </a:solidFill>
-                <a:latin typeface="Arial"/>
-              </a:defRPr>
-            </a:pPr>
-            <a:r>
-              <a:t>5. Breeden–Litzenberger</a:t>
+                  <a:srgbClr val="111111"/>
+                </a:solidFill>
+                <a:latin typeface="Arial"/>
+              </a:defRPr>
+            </a:pPr>
+            <a:r>
+              <a:t>5. De la courbe de calls à la RND</a:t>
             </a:r>
           </a:p>
         </p:txBody>
@@ -6102,8 +6402,8 @@
         </p:nvSpPr>
         <p:spPr>
           <a:xfrm>
-            <a:off x="594360" y="6510528"/>
-            <a:ext cx="10972800" cy="182880"/>
+            <a:off x="566928" y="6510528"/>
+            <a:ext cx="10972800" cy="164592"/>
           </a:xfrm>
           <a:prstGeom prst="rect">
             <a:avLst/>
@@ -6119,13 +6419,13 @@
             <a:pPr>
               <a:defRPr sz="800">
                 <a:solidFill>
-                  <a:srgbClr val="60717D"/>
-                </a:solidFill>
-                <a:latin typeface="Arial"/>
-              </a:defRPr>
-            </a:pPr>
-            <a:r>
-              <a:t>Projet PI² n°176 — Suivi n°1     6/10</a:t>
+                  <a:srgbClr val="59636C"/>
+                </a:solidFill>
+                <a:latin typeface="Arial"/>
+              </a:defRPr>
+            </a:pPr>
+            <a:r>
+              <a:t>Projet PI² n°176  ·  Suivi n°1  ·  23 octobre 2026                                      6/11</a:t>
             </a:r>
           </a:p>
         </p:txBody>
@@ -6146,69 +6446,38 @@
         </p:blipFill>
         <p:spPr>
           <a:xfrm>
-            <a:off x="685800" y="1143000"/>
-            <a:ext cx="6812280" cy="4480560"/>
+            <a:off x="320040" y="1522700"/>
+            <a:ext cx="5669280" cy="3163375"/>
           </a:xfrm>
           <a:prstGeom prst="rect">
             <a:avLst/>
           </a:prstGeom>
         </p:spPr>
       </p:pic>
-      <p:sp>
-        <p:nvSpPr>
-          <p:cNvPr id="7" name="Rounded Rectangle 6"/>
-          <p:cNvSpPr/>
-          <p:nvPr/>
-        </p:nvSpPr>
-        <p:spPr>
-          <a:xfrm>
-            <a:off x="7772400" y="1325880"/>
-            <a:ext cx="3657600" cy="960120"/>
-          </a:xfrm>
-          <a:prstGeom prst="roundRect">
-            <a:avLst/>
-          </a:prstGeom>
-          <a:solidFill>
-            <a:srgbClr val="EAF2F6"/>
-          </a:solidFill>
-          <a:ln>
-            <a:solidFill>
-              <a:srgbClr val="168AAD"/>
-            </a:solidFill>
-          </a:ln>
-        </p:spPr>
-        <p:style>
-          <a:lnRef idx="1">
-            <a:schemeClr val="accent1"/>
-          </a:lnRef>
-          <a:fillRef idx="3">
-            <a:schemeClr val="accent1"/>
-          </a:fillRef>
-          <a:effectRef idx="2">
-            <a:schemeClr val="accent1"/>
-          </a:effectRef>
-          <a:fontRef idx="minor">
-            <a:schemeClr val="lt1"/>
-          </a:fontRef>
-        </p:style>
-        <p:txBody>
-          <a:bodyPr rtlCol="0" anchor="ctr"/>
-          <a:lstStyle/>
-          <a:p>
-            <a:pPr algn="ctr">
-              <a:defRPr b="1" sz="1900">
-                <a:solidFill>
-                  <a:srgbClr val="153A5B"/>
-                </a:solidFill>
-                <a:latin typeface="Arial"/>
-              </a:defRPr>
-            </a:pPr>
-            <a:r>
-              <a:t>q(K,T) = (1/D) × ∂²C/∂K²</a:t>
-            </a:r>
-          </a:p>
-        </p:txBody>
-      </p:sp>
+      <p:pic>
+        <p:nvPicPr>
+          <p:cNvPr id="7" name="Picture 6" descr="04_risk_neutral_density.png"/>
+          <p:cNvPicPr>
+            <a:picLocks noChangeAspect="1"/>
+          </p:cNvPicPr>
+          <p:nvPr/>
+        </p:nvPicPr>
+        <p:blipFill>
+          <a:blip r:embed="rId3"/>
+          <a:stretch>
+            <a:fillRect/>
+          </a:stretch>
+        </p:blipFill>
+        <p:spPr>
+          <a:xfrm>
+            <a:off x="6144768" y="1524578"/>
+            <a:ext cx="5669280" cy="3159618"/>
+          </a:xfrm>
+          <a:prstGeom prst="rect">
+            <a:avLst/>
+          </a:prstGeom>
+        </p:spPr>
+      </p:pic>
       <p:sp>
         <p:nvSpPr>
           <p:cNvPr id="8" name="TextBox 7"/>
@@ -6217,8 +6486,8 @@
         </p:nvSpPr>
         <p:spPr>
           <a:xfrm>
-            <a:off x="7818120" y="2651760"/>
-            <a:ext cx="3474720" cy="2743200"/>
+            <a:off x="502920" y="5212080"/>
+            <a:ext cx="5303520" cy="320040"/>
           </a:xfrm>
           <a:prstGeom prst="rect">
             <a:avLst/>
@@ -6226,60 +6495,85 @@
           <a:noFill/>
         </p:spPr>
         <p:txBody>
-          <a:bodyPr wrap="square" lIns="45720" rIns="27432">
+          <a:bodyPr wrap="square" lIns="0" rIns="0">
             <a:spAutoFit/>
           </a:bodyPr>
           <a:lstStyle/>
           <a:p>
-            <a:pPr>
-              <a:spcAft>
-                <a:spcPts val="1000"/>
-              </a:spcAft>
-              <a:defRPr sz="1700">
-                <a:solidFill>
-                  <a:srgbClr val="24323D"/>
-                </a:solidFill>
-                <a:latin typeface="Arial"/>
-              </a:defRPr>
-            </a:pPr>
-            <a:r>
-              <a:t>• Dérivation de la courbe lissée, pas des prix bruts.</a:t>
-            </a:r>
-          </a:p>
-          <a:p>
-            <a:pPr>
-              <a:spcAft>
-                <a:spcPts val="1000"/>
-              </a:spcAft>
-              <a:defRPr sz="1700">
-                <a:solidFill>
-                  <a:srgbClr val="24323D"/>
-                </a:solidFill>
-                <a:latin typeface="Arial"/>
-              </a:defRPr>
-            </a:pPr>
-            <a:r>
-              <a:t>• Grille régulière de 1 601 strikes.</a:t>
-            </a:r>
-          </a:p>
-          <a:p>
-            <a:pPr>
-              <a:spcAft>
-                <a:spcPts val="1000"/>
-              </a:spcAft>
-              <a:defRPr sz="1700">
-                <a:solidFill>
-                  <a:srgbClr val="24323D"/>
-                </a:solidFill>
-                <a:latin typeface="Arial"/>
-              </a:defRPr>
-            </a:pPr>
-            <a:r>
-              <a:t>• Contrôles : masse, positivité, moyenne et convexité.</a:t>
-            </a:r>
-          </a:p>
-        </p:txBody>
-      </p:sp>
+            <a:pPr algn="ctr">
+              <a:defRPr sz="900" b="0">
+                <a:solidFill>
+                  <a:srgbClr val="59636C"/>
+                </a:solidFill>
+                <a:latin typeface="Arial"/>
+              </a:defRPr>
+            </a:pPr>
+            <a:r>
+              <a:t>Courbe de calls reconstruite sur 1 601 strikes.</a:t>
+            </a:r>
+          </a:p>
+        </p:txBody>
+      </p:sp>
+      <p:sp>
+        <p:nvSpPr>
+          <p:cNvPr id="9" name="TextBox 8"/>
+          <p:cNvSpPr txBox="1"/>
+          <p:nvPr/>
+        </p:nvSpPr>
+        <p:spPr>
+          <a:xfrm>
+            <a:off x="6263640" y="5212080"/>
+            <a:ext cx="5303520" cy="320040"/>
+          </a:xfrm>
+          <a:prstGeom prst="rect">
+            <a:avLst/>
+          </a:prstGeom>
+          <a:noFill/>
+        </p:spPr>
+        <p:txBody>
+          <a:bodyPr wrap="square" lIns="0" rIns="0">
+            <a:spAutoFit/>
+          </a:bodyPr>
+          <a:lstStyle/>
+          <a:p>
+            <a:pPr algn="ctr">
+              <a:defRPr sz="900" b="0">
+                <a:solidFill>
+                  <a:srgbClr val="59636C"/>
+                </a:solidFill>
+                <a:latin typeface="Arial"/>
+              </a:defRPr>
+            </a:pPr>
+            <a:r>
+              <a:t>Densité obtenue par dérivée seconde de la courbe lissée.</a:t>
+            </a:r>
+          </a:p>
+        </p:txBody>
+      </p:sp>
+      <p:pic>
+        <p:nvPicPr>
+          <p:cNvPr id="10" name="Picture 9" descr="eq_bl.png"/>
+          <p:cNvPicPr>
+            <a:picLocks noChangeAspect="1"/>
+          </p:cNvPicPr>
+          <p:nvPr/>
+        </p:nvPicPr>
+        <p:blipFill>
+          <a:blip r:embed="rId4"/>
+          <a:stretch>
+            <a:fillRect/>
+          </a:stretch>
+        </p:blipFill>
+        <p:spPr>
+          <a:xfrm>
+            <a:off x="4845553" y="5550408"/>
+            <a:ext cx="2470413" cy="530352"/>
+          </a:xfrm>
+          <a:prstGeom prst="rect">
+            <a:avLst/>
+          </a:prstGeom>
+        </p:spPr>
+      </p:pic>
     </p:spTree>
   </p:cSld>
   <p:clrMapOvr>
@@ -6349,14 +6643,14 @@
         </p:nvSpPr>
         <p:spPr>
           <a:xfrm>
-            <a:off x="0" y="0"/>
-            <a:ext cx="12191695" cy="164592"/>
+            <a:off x="530352" y="868680"/>
+            <a:ext cx="11109960" cy="16459"/>
           </a:xfrm>
           <a:prstGeom prst="rect">
             <a:avLst/>
           </a:prstGeom>
           <a:solidFill>
-            <a:srgbClr val="153A5B"/>
+            <a:srgbClr val="111111"/>
           </a:solidFill>
           <a:ln>
             <a:noFill/>
@@ -6392,8 +6686,8 @@
         </p:nvSpPr>
         <p:spPr>
           <a:xfrm>
-            <a:off x="594360" y="347472"/>
-            <a:ext cx="10881360" cy="566928"/>
+            <a:off x="566928" y="274320"/>
+            <a:ext cx="10881360" cy="502920"/>
           </a:xfrm>
           <a:prstGeom prst="rect">
             <a:avLst/>
@@ -6409,13 +6703,13 @@
             <a:pPr>
               <a:defRPr b="1" sz="2500">
                 <a:solidFill>
-                  <a:srgbClr val="153A5B"/>
-                </a:solidFill>
-                <a:latin typeface="Arial"/>
-              </a:defRPr>
-            </a:pPr>
-            <a:r>
-              <a:t>6. Première densité risque-neutre</a:t>
+                  <a:srgbClr val="111111"/>
+                </a:solidFill>
+                <a:latin typeface="Arial"/>
+              </a:defRPr>
+            </a:pPr>
+            <a:r>
+              <a:t>6. Diagnostics de la RND à 91 jours</a:t>
             </a:r>
           </a:p>
         </p:txBody>
@@ -6428,8 +6722,8 @@
         </p:nvSpPr>
         <p:spPr>
           <a:xfrm>
-            <a:off x="594360" y="6510528"/>
-            <a:ext cx="10972800" cy="182880"/>
+            <a:off x="566928" y="6510528"/>
+            <a:ext cx="10972800" cy="164592"/>
           </a:xfrm>
           <a:prstGeom prst="rect">
             <a:avLst/>
@@ -6445,20 +6739,20 @@
             <a:pPr>
               <a:defRPr sz="800">
                 <a:solidFill>
-                  <a:srgbClr val="60717D"/>
-                </a:solidFill>
-                <a:latin typeface="Arial"/>
-              </a:defRPr>
-            </a:pPr>
-            <a:r>
-              <a:t>Projet PI² n°176 — Suivi n°1     7/10</a:t>
+                  <a:srgbClr val="59636C"/>
+                </a:solidFill>
+                <a:latin typeface="Arial"/>
+              </a:defRPr>
+            </a:pPr>
+            <a:r>
+              <a:t>Projet PI² n°176  ·  Suivi n°1  ·  23 octobre 2026                                      7/11</a:t>
             </a:r>
           </a:p>
         </p:txBody>
       </p:sp>
       <p:pic>
         <p:nvPicPr>
-          <p:cNvPr id="6" name="Picture 5" descr="04_risk_neutral_density.png"/>
+          <p:cNvPr id="6" name="Picture 5" descr="07_support_and_cdf.png"/>
           <p:cNvPicPr>
             <a:picLocks noChangeAspect="1"/>
           </p:cNvPicPr>
@@ -6472,8 +6766,8 @@
         </p:blipFill>
         <p:spPr>
           <a:xfrm>
-            <a:off x="640080" y="1097280"/>
-            <a:ext cx="6949440" cy="4617720"/>
+            <a:off x="411480" y="1916513"/>
+            <a:ext cx="7772400" cy="2704932"/>
           </a:xfrm>
           <a:prstGeom prst="rect">
             <a:avLst/>
@@ -6482,62 +6776,66 @@
       </p:pic>
       <p:sp>
         <p:nvSpPr>
-          <p:cNvPr id="7" name="Rounded Rectangle 6"/>
-          <p:cNvSpPr/>
-          <p:nvPr/>
-        </p:nvSpPr>
-        <p:spPr>
-          <a:xfrm>
-            <a:off x="7863840" y="1325880"/>
-            <a:ext cx="3108960" cy="1051560"/>
-          </a:xfrm>
-          <a:prstGeom prst="roundRect">
-            <a:avLst/>
-          </a:prstGeom>
-          <a:solidFill>
-            <a:srgbClr val="EAF2F6"/>
-          </a:solidFill>
-          <a:ln>
-            <a:solidFill>
-              <a:srgbClr val="168AAD"/>
-            </a:solidFill>
-          </a:ln>
-        </p:spPr>
-        <p:style>
-          <a:lnRef idx="1">
-            <a:schemeClr val="accent1"/>
-          </a:lnRef>
-          <a:fillRef idx="3">
-            <a:schemeClr val="accent1"/>
-          </a:fillRef>
-          <a:effectRef idx="2">
-            <a:schemeClr val="accent1"/>
-          </a:effectRef>
-          <a:fontRef idx="minor">
-            <a:schemeClr val="lt1"/>
-          </a:fontRef>
-        </p:style>
-        <p:txBody>
-          <a:bodyPr rtlCol="0" anchor="ctr"/>
-          <a:lstStyle/>
-          <a:p>
-            <a:pPr algn="ctr">
-              <a:defRPr b="1" sz="2400">
-                <a:solidFill>
-                  <a:srgbClr val="153A5B"/>
-                </a:solidFill>
-                <a:latin typeface="Arial"/>
-              </a:defRPr>
-            </a:pPr>
-            <a:r>
-              <a:t>0.9953</a:t>
-            </a:r>
-          </a:p>
-          <a:p>
-            <a:pPr algn="ctr">
-              <a:defRPr sz="1000">
-                <a:solidFill>
-                  <a:srgbClr val="60717D"/>
+          <p:cNvPr id="7" name="TextBox 6"/>
+          <p:cNvSpPr txBox="1"/>
+          <p:nvPr/>
+        </p:nvSpPr>
+        <p:spPr>
+          <a:xfrm>
+            <a:off x="8394192" y="1234440"/>
+            <a:ext cx="1143000" cy="347472"/>
+          </a:xfrm>
+          <a:prstGeom prst="rect">
+            <a:avLst/>
+          </a:prstGeom>
+          <a:noFill/>
+        </p:spPr>
+        <p:txBody>
+          <a:bodyPr wrap="square" lIns="0" rIns="0">
+            <a:spAutoFit/>
+          </a:bodyPr>
+          <a:lstStyle/>
+          <a:p>
+            <a:pPr algn="l">
+              <a:defRPr sz="2000" b="1">
+                <a:solidFill>
+                  <a:srgbClr val="111111"/>
+                </a:solidFill>
+                <a:latin typeface="Arial"/>
+              </a:defRPr>
+            </a:pPr>
+            <a:r>
+              <a:t>0.99528</a:t>
+            </a:r>
+          </a:p>
+        </p:txBody>
+      </p:sp>
+      <p:sp>
+        <p:nvSpPr>
+          <p:cNvPr id="8" name="TextBox 7"/>
+          <p:cNvSpPr txBox="1"/>
+          <p:nvPr/>
+        </p:nvSpPr>
+        <p:spPr>
+          <a:xfrm>
+            <a:off x="9582912" y="1261872"/>
+            <a:ext cx="2148839" cy="347472"/>
+          </a:xfrm>
+          <a:prstGeom prst="rect">
+            <a:avLst/>
+          </a:prstGeom>
+          <a:noFill/>
+        </p:spPr>
+        <p:txBody>
+          <a:bodyPr wrap="square" lIns="0" rIns="0">
+            <a:spAutoFit/>
+          </a:bodyPr>
+          <a:lstStyle/>
+          <a:p>
+            <a:pPr algn="l">
+              <a:defRPr sz="1200" b="0">
+                <a:solidFill>
+                  <a:srgbClr val="59636C"/>
                 </a:solidFill>
                 <a:latin typeface="Arial"/>
               </a:defRPr>
@@ -6550,136 +6848,36 @@
       </p:sp>
       <p:sp>
         <p:nvSpPr>
-          <p:cNvPr id="8" name="Rounded Rectangle 7"/>
-          <p:cNvSpPr/>
-          <p:nvPr/>
-        </p:nvSpPr>
-        <p:spPr>
-          <a:xfrm>
-            <a:off x="7863840" y="2651760"/>
-            <a:ext cx="3108960" cy="1051560"/>
-          </a:xfrm>
-          <a:prstGeom prst="roundRect">
-            <a:avLst/>
-          </a:prstGeom>
-          <a:solidFill>
-            <a:srgbClr val="EAF2F6"/>
-          </a:solidFill>
-          <a:ln>
-            <a:solidFill>
-              <a:srgbClr val="168AAD"/>
-            </a:solidFill>
-          </a:ln>
-        </p:spPr>
-        <p:style>
-          <a:lnRef idx="1">
-            <a:schemeClr val="accent1"/>
-          </a:lnRef>
-          <a:fillRef idx="3">
-            <a:schemeClr val="accent1"/>
-          </a:fillRef>
-          <a:effectRef idx="2">
-            <a:schemeClr val="accent1"/>
-          </a:effectRef>
-          <a:fontRef idx="minor">
-            <a:schemeClr val="lt1"/>
-          </a:fontRef>
-        </p:style>
-        <p:txBody>
-          <a:bodyPr rtlCol="0" anchor="ctr"/>
-          <a:lstStyle/>
-          <a:p>
-            <a:pPr algn="ctr">
-              <a:defRPr b="1" sz="2400">
-                <a:solidFill>
-                  <a:srgbClr val="153A5B"/>
-                </a:solidFill>
-                <a:latin typeface="Arial"/>
-              </a:defRPr>
-            </a:pPr>
-            <a:r>
-              <a:t>7,776</a:t>
-            </a:r>
-          </a:p>
-          <a:p>
-            <a:pPr algn="ctr">
-              <a:defRPr sz="1000">
-                <a:solidFill>
-                  <a:srgbClr val="60717D"/>
-                </a:solidFill>
-                <a:latin typeface="Arial"/>
-              </a:defRPr>
-            </a:pPr>
-            <a:r>
-              <a:t>moyenne normalisée</a:t>
-            </a:r>
-          </a:p>
-        </p:txBody>
-      </p:sp>
-      <p:sp>
-        <p:nvSpPr>
-          <p:cNvPr id="9" name="Rounded Rectangle 8"/>
-          <p:cNvSpPr/>
-          <p:nvPr/>
-        </p:nvSpPr>
-        <p:spPr>
-          <a:xfrm>
-            <a:off x="7863840" y="3977639"/>
-            <a:ext cx="3108960" cy="1051560"/>
-          </a:xfrm>
-          <a:prstGeom prst="roundRect">
-            <a:avLst/>
-          </a:prstGeom>
-          <a:solidFill>
-            <a:srgbClr val="EAF2F6"/>
-          </a:solidFill>
-          <a:ln>
-            <a:solidFill>
-              <a:srgbClr val="168AAD"/>
-            </a:solidFill>
-          </a:ln>
-        </p:spPr>
-        <p:style>
-          <a:lnRef idx="1">
-            <a:schemeClr val="accent1"/>
-          </a:lnRef>
-          <a:fillRef idx="3">
-            <a:schemeClr val="accent1"/>
-          </a:fillRef>
-          <a:effectRef idx="2">
-            <a:schemeClr val="accent1"/>
-          </a:effectRef>
-          <a:fontRef idx="minor">
-            <a:schemeClr val="lt1"/>
-          </a:fontRef>
-        </p:style>
-        <p:txBody>
-          <a:bodyPr rtlCol="0" anchor="ctr"/>
-          <a:lstStyle/>
-          <a:p>
-            <a:pPr algn="ctr">
-              <a:defRPr b="1" sz="2400">
-                <a:solidFill>
-                  <a:srgbClr val="153A5B"/>
+          <p:cNvPr id="9" name="TextBox 8"/>
+          <p:cNvSpPr txBox="1"/>
+          <p:nvPr/>
+        </p:nvSpPr>
+        <p:spPr>
+          <a:xfrm>
+            <a:off x="8394192" y="1847088"/>
+            <a:ext cx="1143000" cy="347472"/>
+          </a:xfrm>
+          <a:prstGeom prst="rect">
+            <a:avLst/>
+          </a:prstGeom>
+          <a:noFill/>
+        </p:spPr>
+        <p:txBody>
+          <a:bodyPr wrap="square" lIns="0" rIns="0">
+            <a:spAutoFit/>
+          </a:bodyPr>
+          <a:lstStyle/>
+          <a:p>
+            <a:pPr algn="l">
+              <a:defRPr sz="2000" b="1">
+                <a:solidFill>
+                  <a:srgbClr val="111111"/>
                 </a:solidFill>
                 <a:latin typeface="Arial"/>
               </a:defRPr>
             </a:pPr>
             <a:r>
               <a:t>0.000117</a:t>
-            </a:r>
-          </a:p>
-          <a:p>
-            <a:pPr algn="ctr">
-              <a:defRPr sz="1000">
-                <a:solidFill>
-                  <a:srgbClr val="60717D"/>
-                </a:solidFill>
-                <a:latin typeface="Arial"/>
-              </a:defRPr>
-            </a:pPr>
-            <a:r>
-              <a:t>masse négative</a:t>
             </a:r>
           </a:p>
         </p:txBody>
@@ -6692,8 +6890,8 @@
         </p:nvSpPr>
         <p:spPr>
           <a:xfrm>
-            <a:off x="7818120" y="5349240"/>
-            <a:ext cx="3566160" cy="594360"/>
+            <a:off x="9582912" y="1874519"/>
+            <a:ext cx="2148839" cy="347472"/>
           </a:xfrm>
           <a:prstGeom prst="rect">
             <a:avLst/>
@@ -6701,21 +6899,200 @@
           <a:noFill/>
         </p:spPr>
         <p:txBody>
-          <a:bodyPr wrap="none">
+          <a:bodyPr wrap="square" lIns="0" rIns="0">
             <a:spAutoFit/>
           </a:bodyPr>
           <a:lstStyle/>
           <a:p>
+            <a:pPr algn="l">
+              <a:defRPr sz="1200" b="0">
+                <a:solidFill>
+                  <a:srgbClr val="59636C"/>
+                </a:solidFill>
+                <a:latin typeface="Arial"/>
+              </a:defRPr>
+            </a:pPr>
+            <a:r>
+              <a:t>masse négative</a:t>
+            </a:r>
+          </a:p>
+        </p:txBody>
+      </p:sp>
+      <p:sp>
+        <p:nvSpPr>
+          <p:cNvPr id="11" name="TextBox 10"/>
+          <p:cNvSpPr txBox="1"/>
+          <p:nvPr/>
+        </p:nvSpPr>
+        <p:spPr>
+          <a:xfrm>
+            <a:off x="8394192" y="2459736"/>
+            <a:ext cx="1143000" cy="347472"/>
+          </a:xfrm>
+          <a:prstGeom prst="rect">
+            <a:avLst/>
+          </a:prstGeom>
+          <a:noFill/>
+        </p:spPr>
+        <p:txBody>
+          <a:bodyPr wrap="square" lIns="0" rIns="0">
+            <a:spAutoFit/>
+          </a:bodyPr>
+          <a:lstStyle/>
+          <a:p>
+            <a:pPr algn="l">
+              <a:defRPr sz="2000" b="1">
+                <a:solidFill>
+                  <a:srgbClr val="111111"/>
+                </a:solidFill>
+                <a:latin typeface="Arial"/>
+              </a:defRPr>
+            </a:pPr>
+            <a:r>
+              <a:t>+20.31</a:t>
+            </a:r>
+          </a:p>
+        </p:txBody>
+      </p:sp>
+      <p:sp>
+        <p:nvSpPr>
+          <p:cNvPr id="12" name="TextBox 11"/>
+          <p:cNvSpPr txBox="1"/>
+          <p:nvPr/>
+        </p:nvSpPr>
+        <p:spPr>
+          <a:xfrm>
+            <a:off x="9582912" y="2487168"/>
+            <a:ext cx="2148839" cy="347472"/>
+          </a:xfrm>
+          <a:prstGeom prst="rect">
+            <a:avLst/>
+          </a:prstGeom>
+          <a:noFill/>
+        </p:spPr>
+        <p:txBody>
+          <a:bodyPr wrap="square" lIns="0" rIns="0">
+            <a:spAutoFit/>
+          </a:bodyPr>
+          <a:lstStyle/>
+          <a:p>
+            <a:pPr algn="l">
+              <a:defRPr sz="1200" b="0">
+                <a:solidFill>
+                  <a:srgbClr val="59636C"/>
+                </a:solidFill>
+                <a:latin typeface="Arial"/>
+              </a:defRPr>
+            </a:pPr>
+            <a:r>
+              <a:t>moyenne − forward</a:t>
+            </a:r>
+          </a:p>
+        </p:txBody>
+      </p:sp>
+      <p:sp>
+        <p:nvSpPr>
+          <p:cNvPr id="13" name="TextBox 12"/>
+          <p:cNvSpPr txBox="1"/>
+          <p:nvPr/>
+        </p:nvSpPr>
+        <p:spPr>
+          <a:xfrm>
+            <a:off x="8302752" y="3246120"/>
+            <a:ext cx="3566160" cy="2148840"/>
+          </a:xfrm>
+          <a:prstGeom prst="rect">
+            <a:avLst/>
+          </a:prstGeom>
+          <a:noFill/>
+        </p:spPr>
+        <p:txBody>
+          <a:bodyPr wrap="square" lIns="18288" rIns="0">
+            <a:spAutoFit/>
+          </a:bodyPr>
+          <a:lstStyle/>
+          <a:p>
+            <a:pPr>
+              <a:spcAft>
+                <a:spcPts val="1000"/>
+              </a:spcAft>
+              <a:defRPr sz="1300">
+                <a:solidFill>
+                  <a:srgbClr val="27313A"/>
+                </a:solidFill>
+                <a:latin typeface="Arial"/>
+              </a:defRPr>
+            </a:pPr>
+            <a:r>
+              <a:t>• Aucune négativité matérielle au-delà de 0,1 % du pic.</a:t>
+            </a:r>
+          </a:p>
+          <a:p>
+            <a:pPr>
+              <a:spcAft>
+                <a:spcPts val="1000"/>
+              </a:spcAft>
+              <a:defRPr sz="1300">
+                <a:solidFill>
+                  <a:srgbClr val="27313A"/>
+                </a:solidFill>
+                <a:latin typeface="Arial"/>
+              </a:defRPr>
+            </a:pPr>
+            <a:r>
+              <a:t>• 0,47 % de masse manque principalement dans la queue gauche.</a:t>
+            </a:r>
+          </a:p>
+          <a:p>
+            <a:pPr>
+              <a:spcAft>
+                <a:spcPts val="1000"/>
+              </a:spcAft>
+              <a:defRPr sz="1300">
+                <a:solidFill>
+                  <a:srgbClr val="27313A"/>
+                </a:solidFill>
+                <a:latin typeface="Arial"/>
+              </a:defRPr>
+            </a:pPr>
+            <a:r>
+              <a:t>• Le support fini interdit d’interpréter les queues sans test de robustesse.</a:t>
+            </a:r>
+          </a:p>
+        </p:txBody>
+      </p:sp>
+      <p:sp>
+        <p:nvSpPr>
+          <p:cNvPr id="14" name="TextBox 13"/>
+          <p:cNvSpPr txBox="1"/>
+          <p:nvPr/>
+        </p:nvSpPr>
+        <p:spPr>
+          <a:xfrm>
+            <a:off x="685800" y="5806440"/>
+            <a:ext cx="10972800" cy="347472"/>
+          </a:xfrm>
+          <a:prstGeom prst="rect">
+            <a:avLst/>
+          </a:prstGeom>
+          <a:noFill/>
+        </p:spPr>
+        <p:txBody>
+          <a:bodyPr wrap="square" lIns="0" rIns="0">
+            <a:spAutoFit/>
+          </a:bodyPr>
+          <a:lstStyle/>
+          <a:p>
             <a:pPr algn="ctr">
-              <a:defRPr sz="1300">
-                <a:solidFill>
-                  <a:srgbClr val="E07A3F"/>
-                </a:solidFill>
-                <a:latin typeface="Arial"/>
-              </a:defRPr>
-            </a:pPr>
-            <a:r>
-              <a:t>Aucune négativité matérielle &gt; 0,1 % du pic</a:t>
+              <a:defRPr sz="1500" b="1">
+                <a:solidFill>
+                  <a:srgbClr val="A33A32"/>
+                </a:solidFill>
+                <a:latin typeface="Arial"/>
+              </a:defRPr>
+            </a:pPr>
+            <a:r>
+              <a:t>Diagnostic, pas correction définitive : eSSVI ou lissage convexe à comparer.</a:t>
             </a:r>
           </a:p>
         </p:txBody>
@@ -6789,14 +7166,14 @@
         </p:nvSpPr>
         <p:spPr>
           <a:xfrm>
-            <a:off x="0" y="0"/>
-            <a:ext cx="12191695" cy="164592"/>
+            <a:off x="530352" y="868680"/>
+            <a:ext cx="11109960" cy="16459"/>
           </a:xfrm>
           <a:prstGeom prst="rect">
             <a:avLst/>
           </a:prstGeom>
           <a:solidFill>
-            <a:srgbClr val="153A5B"/>
+            <a:srgbClr val="111111"/>
           </a:solidFill>
           <a:ln>
             <a:noFill/>
@@ -6832,8 +7209,8 @@
         </p:nvSpPr>
         <p:spPr>
           <a:xfrm>
-            <a:off x="594360" y="347472"/>
-            <a:ext cx="10881360" cy="566928"/>
+            <a:off x="566928" y="274320"/>
+            <a:ext cx="10881360" cy="502920"/>
           </a:xfrm>
           <a:prstGeom prst="rect">
             <a:avLst/>
@@ -6849,13 +7226,13 @@
             <a:pPr>
               <a:defRPr b="1" sz="2500">
                 <a:solidFill>
-                  <a:srgbClr val="153A5B"/>
-                </a:solidFill>
-                <a:latin typeface="Arial"/>
-              </a:defRPr>
-            </a:pPr>
-            <a:r>
-              <a:t>7. Structure par terme des RND</a:t>
+                  <a:srgbClr val="111111"/>
+                </a:solidFill>
+                <a:latin typeface="Arial"/>
+              </a:defRPr>
+            </a:pPr>
+            <a:r>
+              <a:t>7. Structure par terme : six maturités, une seule date</a:t>
             </a:r>
           </a:p>
         </p:txBody>
@@ -6868,8 +7245,8 @@
         </p:nvSpPr>
         <p:spPr>
           <a:xfrm>
-            <a:off x="594360" y="6510528"/>
-            <a:ext cx="10972800" cy="182880"/>
+            <a:off x="566928" y="6510528"/>
+            <a:ext cx="10972800" cy="164592"/>
           </a:xfrm>
           <a:prstGeom prst="rect">
             <a:avLst/>
@@ -6885,13 +7262,13 @@
             <a:pPr>
               <a:defRPr sz="800">
                 <a:solidFill>
-                  <a:srgbClr val="60717D"/>
-                </a:solidFill>
-                <a:latin typeface="Arial"/>
-              </a:defRPr>
-            </a:pPr>
-            <a:r>
-              <a:t>Projet PI² n°176 — Suivi n°1     8/10</a:t>
+                  <a:srgbClr val="59636C"/>
+                </a:solidFill>
+                <a:latin typeface="Arial"/>
+              </a:defRPr>
+            </a:pPr>
+            <a:r>
+              <a:t>Projet PI² n°176  ·  Suivi n°1  ·  23 octobre 2026                                      8/11</a:t>
             </a:r>
           </a:p>
         </p:txBody>
@@ -6912,24 +7289,48 @@
         </p:blipFill>
         <p:spPr>
           <a:xfrm>
-            <a:off x="502920" y="987552"/>
-            <a:ext cx="7452360" cy="5257800"/>
+            <a:off x="1537180" y="932688"/>
+            <a:ext cx="5795319" cy="5413248"/>
           </a:xfrm>
           <a:prstGeom prst="rect">
             <a:avLst/>
           </a:prstGeom>
         </p:spPr>
       </p:pic>
-      <p:sp>
-        <p:nvSpPr>
-          <p:cNvPr id="7" name="TextBox 6"/>
+      <p:pic>
+        <p:nvPicPr>
+          <p:cNvPr id="7" name="Picture 6" descr="eq_change.png"/>
+          <p:cNvPicPr>
+            <a:picLocks noChangeAspect="1"/>
+          </p:cNvPicPr>
+          <p:nvPr/>
+        </p:nvPicPr>
+        <p:blipFill>
+          <a:blip r:embed="rId3"/>
+          <a:stretch>
+            <a:fillRect/>
+          </a:stretch>
+        </p:blipFill>
+        <p:spPr>
+          <a:xfrm>
+            <a:off x="8458200" y="1284961"/>
+            <a:ext cx="3429000" cy="520749"/>
+          </a:xfrm>
+          <a:prstGeom prst="rect">
+            <a:avLst/>
+          </a:prstGeom>
+        </p:spPr>
+      </p:pic>
+      <p:sp>
+        <p:nvSpPr>
+          <p:cNvPr id="8" name="TextBox 7"/>
           <p:cNvSpPr txBox="1"/>
           <p:nvPr/>
         </p:nvSpPr>
         <p:spPr>
           <a:xfrm>
-            <a:off x="8183879" y="1325880"/>
-            <a:ext cx="3429000" cy="4297680"/>
+            <a:off x="8549640" y="2148840"/>
+            <a:ext cx="3246120" cy="3566160"/>
           </a:xfrm>
           <a:prstGeom prst="rect">
             <a:avLst/>
@@ -6937,7 +7338,7 @@
           <a:noFill/>
         </p:spPr>
         <p:txBody>
-          <a:bodyPr wrap="square" lIns="45720" rIns="27432">
+          <a:bodyPr wrap="square" lIns="18288" rIns="0">
             <a:spAutoFit/>
           </a:bodyPr>
           <a:lstStyle/>
@@ -6946,15 +7347,15 @@
               <a:spcAft>
                 <a:spcPts val="1000"/>
               </a:spcAft>
-              <a:defRPr sz="1600">
-                <a:solidFill>
-                  <a:srgbClr val="24323D"/>
-                </a:solidFill>
-                <a:latin typeface="Arial"/>
-              </a:defRPr>
-            </a:pPr>
-            <a:r>
-              <a:t>• Six maturités : 31 à 182 jours.</a:t>
+              <a:defRPr sz="1300">
+                <a:solidFill>
+                  <a:srgbClr val="27313A"/>
+                </a:solidFill>
+                <a:latin typeface="Arial"/>
+              </a:defRPr>
+            </a:pPr>
+            <a:r>
+              <a:t>• 31, 63, 91, 126, 154 et 182 jours.</a:t>
             </a:r>
           </a:p>
           <a:p>
@@ -6962,9 +7363,9 @@
               <a:spcAft>
                 <a:spcPts val="1000"/>
               </a:spcAft>
-              <a:defRPr sz="1600">
-                <a:solidFill>
-                  <a:srgbClr val="24323D"/>
+              <a:defRPr sz="1300">
+                <a:solidFill>
+                  <a:srgbClr val="27313A"/>
                 </a:solidFill>
                 <a:latin typeface="Arial"/>
               </a:defRPr>
@@ -6978,15 +7379,15 @@
               <a:spcAft>
                 <a:spcPts val="1000"/>
               </a:spcAft>
-              <a:defRPr sz="1600">
-                <a:solidFill>
-                  <a:srgbClr val="24323D"/>
-                </a:solidFill>
-                <a:latin typeface="Arial"/>
-              </a:defRPr>
-            </a:pPr>
-            <a:r>
-              <a:t>• La densité s’élargit avec l’horizon.</a:t>
+              <a:defRPr sz="1300">
+                <a:solidFill>
+                  <a:srgbClr val="27313A"/>
+                </a:solidFill>
+                <a:latin typeface="Arial"/>
+              </a:defRPr>
+            </a:pPr>
+            <a:r>
+              <a:t>• Élargissement de la densité avec l’horizon.</a:t>
             </a:r>
           </a:p>
           <a:p>
@@ -6994,15 +7395,31 @@
               <a:spcAft>
                 <a:spcPts val="1000"/>
               </a:spcAft>
-              <a:defRPr sz="1600">
-                <a:solidFill>
-                  <a:srgbClr val="24323D"/>
-                </a:solidFill>
-                <a:latin typeface="Arial"/>
-              </a:defRPr>
-            </a:pPr>
-            <a:r>
-              <a:t>• Il s’agit d’une structure par terme à date fixe, pas encore d’une dynamique temporelle.</a:t>
+              <a:defRPr sz="1300">
+                <a:solidFill>
+                  <a:srgbClr val="27313A"/>
+                </a:solidFill>
+                <a:latin typeface="Arial"/>
+              </a:defRPr>
+            </a:pPr>
+            <a:r>
+              <a:t>• Lignes noires : coupes calibrées ; surface : interpolation visuelle PCHIP.</a:t>
+            </a:r>
+          </a:p>
+          <a:p>
+            <a:pPr>
+              <a:spcAft>
+                <a:spcPts val="1000"/>
+              </a:spcAft>
+              <a:defRPr sz="1300">
+                <a:solidFill>
+                  <a:srgbClr val="27313A"/>
+                </a:solidFill>
+                <a:latin typeface="Arial"/>
+              </a:defRPr>
+            </a:pPr>
+            <a:r>
+              <a:t>• Ce n’est pas encore une dynamique temporelle.</a:t>
             </a:r>
           </a:p>
         </p:txBody>
@@ -7076,14 +7493,14 @@
         </p:nvSpPr>
         <p:spPr>
           <a:xfrm>
-            <a:off x="0" y="0"/>
-            <a:ext cx="12191695" cy="164592"/>
+            <a:off x="530352" y="868680"/>
+            <a:ext cx="11109960" cy="16459"/>
           </a:xfrm>
           <a:prstGeom prst="rect">
             <a:avLst/>
           </a:prstGeom>
           <a:solidFill>
-            <a:srgbClr val="153A5B"/>
+            <a:srgbClr val="111111"/>
           </a:solidFill>
           <a:ln>
             <a:noFill/>
@@ -7119,8 +7536,8 @@
         </p:nvSpPr>
         <p:spPr>
           <a:xfrm>
-            <a:off x="594360" y="347472"/>
-            <a:ext cx="10881360" cy="566928"/>
+            <a:off x="566928" y="274320"/>
+            <a:ext cx="10881360" cy="502920"/>
           </a:xfrm>
           <a:prstGeom prst="rect">
             <a:avLst/>
@@ -7136,13 +7553,13 @@
             <a:pPr>
               <a:defRPr b="1" sz="2500">
                 <a:solidFill>
-                  <a:srgbClr val="153A5B"/>
-                </a:solidFill>
-                <a:latin typeface="Arial"/>
-              </a:defRPr>
-            </a:pPr>
-            <a:r>
-              <a:t>8. Validation et limites</a:t>
+                  <a:srgbClr val="111111"/>
+                </a:solidFill>
+                <a:latin typeface="Arial"/>
+              </a:defRPr>
+            </a:pPr>
+            <a:r>
+              <a:t>8. Toutes les maturités ne sont pas également fiables</a:t>
             </a:r>
           </a:p>
         </p:txBody>
@@ -7155,8 +7572,8 @@
         </p:nvSpPr>
         <p:spPr>
           <a:xfrm>
-            <a:off x="594360" y="6510528"/>
-            <a:ext cx="10972800" cy="182880"/>
+            <a:off x="566928" y="6510528"/>
+            <a:ext cx="10972800" cy="164592"/>
           </a:xfrm>
           <a:prstGeom prst="rect">
             <a:avLst/>
@@ -7172,27 +7589,75 @@
             <a:pPr>
               <a:defRPr sz="800">
                 <a:solidFill>
-                  <a:srgbClr val="60717D"/>
-                </a:solidFill>
-                <a:latin typeface="Arial"/>
-              </a:defRPr>
-            </a:pPr>
-            <a:r>
-              <a:t>Projet PI² n°176 — Suivi n°1     9/10</a:t>
-            </a:r>
-          </a:p>
-        </p:txBody>
-      </p:sp>
-      <p:sp>
-        <p:nvSpPr>
-          <p:cNvPr id="6" name="TextBox 5"/>
+                  <a:srgbClr val="59636C"/>
+                </a:solidFill>
+                <a:latin typeface="Arial"/>
+              </a:defRPr>
+            </a:pPr>
+            <a:r>
+              <a:t>Projet PI² n°176  ·  Suivi n°1  ·  23 octobre 2026                                      9/11</a:t>
+            </a:r>
+          </a:p>
+        </p:txBody>
+      </p:sp>
+      <p:pic>
+        <p:nvPicPr>
+          <p:cNvPr id="6" name="Picture 5" descr="06_rnd_heatmap_maturity.png"/>
+          <p:cNvPicPr>
+            <a:picLocks noChangeAspect="1"/>
+          </p:cNvPicPr>
+          <p:nvPr/>
+        </p:nvPicPr>
+        <p:blipFill>
+          <a:blip r:embed="rId2"/>
+          <a:stretch>
+            <a:fillRect/>
+          </a:stretch>
+        </p:blipFill>
+        <p:spPr>
+          <a:xfrm>
+            <a:off x="320040" y="1750556"/>
+            <a:ext cx="5577840" cy="3082567"/>
+          </a:xfrm>
+          <a:prstGeom prst="rect">
+            <a:avLst/>
+          </a:prstGeom>
+        </p:spPr>
+      </p:pic>
+      <p:pic>
+        <p:nvPicPr>
+          <p:cNvPr id="7" name="Picture 6" descr="08_term_structure_diagnostics.png"/>
+          <p:cNvPicPr>
+            <a:picLocks noChangeAspect="1"/>
+          </p:cNvPicPr>
+          <p:nvPr/>
+        </p:nvPicPr>
+        <p:blipFill>
+          <a:blip r:embed="rId3"/>
+          <a:stretch>
+            <a:fillRect/>
+          </a:stretch>
+        </p:blipFill>
+        <p:spPr>
+          <a:xfrm>
+            <a:off x="5897880" y="2153894"/>
+            <a:ext cx="5989320" cy="2275890"/>
+          </a:xfrm>
+          <a:prstGeom prst="rect">
+            <a:avLst/>
+          </a:prstGeom>
+        </p:spPr>
+      </p:pic>
+      <p:sp>
+        <p:nvSpPr>
+          <p:cNvPr id="8" name="TextBox 7"/>
           <p:cNvSpPr txBox="1"/>
           <p:nvPr/>
         </p:nvSpPr>
         <p:spPr>
           <a:xfrm>
-            <a:off x="777240" y="1188720"/>
-            <a:ext cx="5212080" cy="2560320"/>
+            <a:off x="685800" y="5705856"/>
+            <a:ext cx="10835640" cy="502920"/>
           </a:xfrm>
           <a:prstGeom prst="rect">
             <a:avLst/>
@@ -7200,198 +7665,21 @@
           <a:noFill/>
         </p:spPr>
         <p:txBody>
-          <a:bodyPr wrap="square" lIns="45720" rIns="27432">
+          <a:bodyPr wrap="square" lIns="0" rIns="0">
             <a:spAutoFit/>
           </a:bodyPr>
           <a:lstStyle/>
           <a:p>
-            <a:pPr>
-              <a:spcAft>
-                <a:spcPts val="1000"/>
-              </a:spcAft>
-              <a:defRPr sz="1900">
-                <a:solidFill>
-                  <a:srgbClr val="24323D"/>
-                </a:solidFill>
-                <a:latin typeface="Arial"/>
-              </a:defRPr>
-            </a:pPr>
-            <a:r>
-              <a:t>• Calcul BL réimplémenté en Julia 1.10.10 sans package externe.</a:t>
-            </a:r>
-          </a:p>
-          <a:p>
-            <a:pPr>
-              <a:spcAft>
-                <a:spcPts val="1000"/>
-              </a:spcAft>
-              <a:defRPr sz="1900">
-                <a:solidFill>
-                  <a:srgbClr val="24323D"/>
-                </a:solidFill>
-                <a:latin typeface="Arial"/>
-              </a:defRPr>
-            </a:pPr>
-            <a:r>
-              <a:t>• Écart moyen Python–Julia : 3,3 × 10^-9.</a:t>
-            </a:r>
-          </a:p>
-          <a:p>
-            <a:pPr>
-              <a:spcAft>
-                <a:spcPts val="1000"/>
-              </a:spcAft>
-              <a:defRPr sz="1900">
-                <a:solidFill>
-                  <a:srgbClr val="24323D"/>
-                </a:solidFill>
-                <a:latin typeface="Arial"/>
-              </a:defRPr>
-            </a:pPr>
-            <a:r>
-              <a:t>• Écart maximal aux bords : 2,1 × 10^-6.</a:t>
-            </a:r>
-          </a:p>
-        </p:txBody>
-      </p:sp>
-      <p:sp>
-        <p:nvSpPr>
-          <p:cNvPr id="7" name="TextBox 6"/>
-          <p:cNvSpPr txBox="1"/>
-          <p:nvPr/>
-        </p:nvSpPr>
-        <p:spPr>
-          <a:xfrm>
-            <a:off x="6400800" y="1188720"/>
-            <a:ext cx="4754880" cy="3474720"/>
-          </a:xfrm>
-          <a:prstGeom prst="rect">
-            <a:avLst/>
-          </a:prstGeom>
-          <a:noFill/>
-        </p:spPr>
-        <p:txBody>
-          <a:bodyPr wrap="square" lIns="45720" rIns="27432">
-            <a:spAutoFit/>
-          </a:bodyPr>
-          <a:lstStyle/>
-          <a:p>
-            <a:pPr>
-              <a:spcAft>
-                <a:spcPts val="1000"/>
-              </a:spcAft>
-              <a:defRPr sz="1800">
-                <a:solidFill>
-                  <a:srgbClr val="E07A3F"/>
-                </a:solidFill>
-                <a:latin typeface="Arial"/>
-              </a:defRPr>
-            </a:pPr>
-            <a:r>
-              <a:t>• Pas encore d’historique quotidien.</a:t>
-            </a:r>
-          </a:p>
-          <a:p>
-            <a:pPr>
-              <a:spcAft>
-                <a:spcPts val="1000"/>
-              </a:spcAft>
-              <a:defRPr sz="1800">
-                <a:solidFill>
-                  <a:srgbClr val="E07A3F"/>
-                </a:solidFill>
-                <a:latin typeface="Arial"/>
-              </a:defRPr>
-            </a:pPr>
-            <a:r>
-              <a:t>• Seuil de spread à tester.</a:t>
-            </a:r>
-          </a:p>
-          <a:p>
-            <a:pPr>
-              <a:spcAft>
-                <a:spcPts val="1000"/>
-              </a:spcAft>
-              <a:defRPr sz="1800">
-                <a:solidFill>
-                  <a:srgbClr val="E07A3F"/>
-                </a:solidFill>
-                <a:latin typeface="Arial"/>
-              </a:defRPr>
-            </a:pPr>
-            <a:r>
-              <a:t>• SVI brute pas totalement sans arbitrage butterfly.</a:t>
-            </a:r>
-          </a:p>
-          <a:p>
-            <a:pPr>
-              <a:spcAft>
-                <a:spcPts val="1000"/>
-              </a:spcAft>
-              <a:defRPr sz="1800">
-                <a:solidFill>
-                  <a:srgbClr val="E07A3F"/>
-                </a:solidFill>
-                <a:latin typeface="Arial"/>
-              </a:defRPr>
-            </a:pPr>
-            <a:r>
-              <a:t>• Besoin d’une maturité constante pour la dynamique.</a:t>
-            </a:r>
-          </a:p>
-        </p:txBody>
-      </p:sp>
-      <p:sp>
-        <p:nvSpPr>
-          <p:cNvPr id="8" name="Rounded Rectangle 7"/>
-          <p:cNvSpPr/>
-          <p:nvPr/>
-        </p:nvSpPr>
-        <p:spPr>
-          <a:xfrm>
-            <a:off x="1005840" y="4251960"/>
-            <a:ext cx="9966960" cy="1051560"/>
-          </a:xfrm>
-          <a:prstGeom prst="roundRect">
-            <a:avLst/>
-          </a:prstGeom>
-          <a:solidFill>
-            <a:srgbClr val="EAF2F6"/>
-          </a:solidFill>
-          <a:ln>
-            <a:solidFill>
-              <a:srgbClr val="168AAD"/>
-            </a:solidFill>
-          </a:ln>
-        </p:spPr>
-        <p:style>
-          <a:lnRef idx="1">
-            <a:schemeClr val="accent1"/>
-          </a:lnRef>
-          <a:fillRef idx="3">
-            <a:schemeClr val="accent1"/>
-          </a:fillRef>
-          <a:effectRef idx="2">
-            <a:schemeClr val="accent1"/>
-          </a:effectRef>
-          <a:fontRef idx="minor">
-            <a:schemeClr val="lt1"/>
-          </a:fontRef>
-        </p:style>
-        <p:txBody>
-          <a:bodyPr rtlCol="0" anchor="ctr"/>
-          <a:lstStyle/>
-          <a:p>
             <a:pPr algn="ctr">
-              <a:defRPr b="1" sz="2000">
-                <a:solidFill>
-                  <a:srgbClr val="153A5B"/>
-                </a:solidFill>
-                <a:latin typeface="Arial"/>
-              </a:defRPr>
-            </a:pPr>
-            <a:r>
-              <a:t>Conclusion technique : pipeline reproductible validé ; profondeur historique encore à sécuriser.</a:t>
+              <a:defRPr sz="1400" b="1">
+                <a:solidFill>
+                  <a:srgbClr val="A33A32"/>
+                </a:solidFill>
+                <a:latin typeface="Arial"/>
+              </a:defRPr>
+            </a:pPr>
+            <a:r>
+              <a:t>La coupe 31 jours est conservée pour le diagnostic, mais exclue des conclusions : masse 1,138 et moyenne 5,4 % au-dessus du forward.</a:t>
             </a:r>
           </a:p>
         </p:txBody>
